--- a/2026_М_ПІ_ІПЗм-24-1_Лабунець_В_В.pptx
+++ b/2026_М_ПІ_ІПЗм-24-1_Лабунець_В_В.pptx
@@ -30,14 +30,14 @@
       <p:regular r:id="rId16"/>
     </p:embeddedFont>
     <p:embeddedFont>
-      <p:font typeface="Open Sans" panose="020B0604020202020204" charset="0"/>
+      <p:font typeface="Calibri" panose="020F0502020204030204" pitchFamily="34" charset="0"/>
       <p:regular r:id="rId17"/>
       <p:bold r:id="rId18"/>
       <p:italic r:id="rId19"/>
       <p:boldItalic r:id="rId20"/>
     </p:embeddedFont>
     <p:embeddedFont>
-      <p:font typeface="Calibri" panose="020F0502020204030204" pitchFamily="34" charset="0"/>
+      <p:font typeface="Open Sans" panose="020B0604020202020204" charset="0"/>
       <p:regular r:id="rId21"/>
       <p:bold r:id="rId22"/>
       <p:italic r:id="rId23"/>
@@ -280,7 +280,7 @@
   </p:defaultTextStyle>
   <p:extLst>
     <p:ext uri="{EFAFB233-063F-42B5-8137-9DF3F51BA10A}">
-      <p15:sldGuideLst xmlns="" xmlns:mc="http://schemas.openxmlformats.org/markup-compatibility/2006" xmlns:mv="urn:schemas-microsoft-com:mac:vml" xmlns:c="http://schemas.openxmlformats.org/drawingml/2006/chart" xmlns:dgm="http://schemas.openxmlformats.org/drawingml/2006/diagram" xmlns:o="urn:schemas-microsoft-com:office:office" xmlns:v="urn:schemas-microsoft-com:vml" xmlns:pvml="urn:schemas-microsoft-com:office:powerpoint" xmlns:com="http://schemas.openxmlformats.org/drawingml/2006/compatibility" xmlns:p14="http://schemas.microsoft.com/office/powerpoint/2010/main" xmlns:p15="http://schemas.microsoft.com/office/powerpoint/2012/main" xmlns:ahyp="http://schemas.microsoft.com/office/drawing/2018/hyperlinkcolor">
+      <p15:sldGuideLst xmlns:ahyp="http://schemas.microsoft.com/office/drawing/2018/hyperlinkcolor" xmlns:p15="http://schemas.microsoft.com/office/powerpoint/2012/main" xmlns:p14="http://schemas.microsoft.com/office/powerpoint/2010/main" xmlns:com="http://schemas.openxmlformats.org/drawingml/2006/compatibility" xmlns:pvml="urn:schemas-microsoft-com:office:powerpoint" xmlns:v="urn:schemas-microsoft-com:vml" xmlns:o="urn:schemas-microsoft-com:office:office" xmlns:dgm="http://schemas.openxmlformats.org/drawingml/2006/diagram" xmlns:c="http://schemas.openxmlformats.org/drawingml/2006/chart" xmlns:mv="urn:schemas-microsoft-com:mac:vml" xmlns:mc="http://schemas.openxmlformats.org/markup-compatibility/2006" xmlns="">
         <p15:guide id="1" orient="horz" pos="1620">
           <p15:clr>
             <a:srgbClr val="747775"/>
@@ -9526,7 +9526,7 @@
           <p:nvPr>
             <p:extLst>
               <p:ext uri="{D42A27DB-BD31-4B8C-83A1-F6EECF244321}">
-                <p14:modId xmlns:p14="http://schemas.microsoft.com/office/powerpoint/2010/main" val="3543173023"/>
+                <p14:modId xmlns:p14="http://schemas.microsoft.com/office/powerpoint/2010/main" val="1540307082"/>
               </p:ext>
             </p:extLst>
           </p:nvPr>
@@ -9593,10 +9593,10 @@
                         </a:spcAft>
                       </a:pPr>
                       <a:r>
-                        <a:rPr lang="uk-UA" sz="1400" dirty="0">
+                        <a:rPr lang="uk-UA" sz="1400" dirty="0" smtClean="0">
                           <a:effectLst/>
                         </a:rPr>
-                        <a:t>Корисність</a:t>
+                        <a:t>Якість</a:t>
                       </a:r>
                       <a:endParaRPr lang="ru-RU" sz="1100" dirty="0">
                         <a:effectLst/>

--- a/2026_М_ПІ_ІПЗм-24-1_Лабунець_В_В.pptx
+++ b/2026_М_ПІ_ІПЗм-24-1_Лабунець_В_В.pptx
@@ -9526,7 +9526,7 @@
           <p:nvPr>
             <p:extLst>
               <p:ext uri="{D42A27DB-BD31-4B8C-83A1-F6EECF244321}">
-                <p14:modId xmlns:p14="http://schemas.microsoft.com/office/powerpoint/2010/main" val="1540307082"/>
+                <p14:modId xmlns:p14="http://schemas.microsoft.com/office/powerpoint/2010/main" val="953190037"/>
               </p:ext>
             </p:extLst>
           </p:nvPr>
@@ -9738,13 +9738,13 @@
                         </a:spcAft>
                       </a:pPr>
                       <a:r>
-                        <a:rPr lang="uk-UA" sz="1400" dirty="0">
+                        <a:rPr lang="uk-UA" sz="1400" dirty="0" smtClean="0">
                           <a:solidFill>
                             <a:srgbClr val="0070C0"/>
                           </a:solidFill>
                           <a:effectLst/>
                         </a:rPr>
-                        <a:t>0.36</a:t>
+                        <a:t>0.34</a:t>
                       </a:r>
                       <a:endParaRPr lang="ru-RU" sz="1100" dirty="0">
                         <a:solidFill>
@@ -9821,13 +9821,13 @@
                         </a:spcAft>
                       </a:pPr>
                       <a:r>
-                        <a:rPr lang="uk-UA" sz="1400" dirty="0">
+                        <a:rPr lang="uk-UA" sz="1400" dirty="0" smtClean="0">
                           <a:solidFill>
                             <a:srgbClr val="0070C0"/>
                           </a:solidFill>
                           <a:effectLst/>
                         </a:rPr>
-                        <a:t>0.305</a:t>
+                        <a:t>0.326</a:t>
                       </a:r>
                       <a:endParaRPr lang="ru-RU" sz="1100" dirty="0">
                         <a:solidFill>
@@ -9898,13 +9898,13 @@
                         </a:spcAft>
                       </a:pPr>
                       <a:r>
-                        <a:rPr lang="uk-UA" sz="1400" dirty="0">
+                        <a:rPr lang="uk-UA" sz="1400" dirty="0" smtClean="0">
                           <a:solidFill>
                             <a:srgbClr val="0070C0"/>
                           </a:solidFill>
                           <a:effectLst/>
                         </a:rPr>
-                        <a:t>0.917</a:t>
+                        <a:t>0.892</a:t>
                       </a:r>
                       <a:endParaRPr lang="ru-RU" sz="1100" dirty="0">
                         <a:solidFill>
@@ -9975,13 +9975,13 @@
                         </a:spcAft>
                       </a:pPr>
                       <a:r>
-                        <a:rPr lang="uk-UA" sz="1400" dirty="0">
+                        <a:rPr lang="uk-UA" sz="1400" dirty="0" smtClean="0">
                           <a:solidFill>
                             <a:srgbClr val="0070C0"/>
                           </a:solidFill>
                           <a:effectLst/>
                         </a:rPr>
-                        <a:t>0.946</a:t>
+                        <a:t>0.966</a:t>
                       </a:r>
                       <a:endParaRPr lang="ru-RU" sz="1100" dirty="0">
                         <a:solidFill>

--- a/2026_М_ПІ_ІПЗм-24-1_Лабунець_В_В.pptx
+++ b/2026_М_ПІ_ІПЗм-24-1_Лабунець_В_В.pptx
@@ -5,7 +5,7 @@
     <p:sldMasterId id="2147483659" r:id="rId1"/>
   </p:sldMasterIdLst>
   <p:notesMasterIdLst>
-    <p:notesMasterId r:id="rId15"/>
+    <p:notesMasterId r:id="rId16"/>
   </p:notesMasterIdLst>
   <p:sldIdLst>
     <p:sldId id="256" r:id="rId2"/>
@@ -13,40 +13,41 @@
     <p:sldId id="258" r:id="rId4"/>
     <p:sldId id="267" r:id="rId5"/>
     <p:sldId id="268" r:id="rId6"/>
-    <p:sldId id="271" r:id="rId7"/>
-    <p:sldId id="275" r:id="rId8"/>
-    <p:sldId id="269" r:id="rId9"/>
-    <p:sldId id="270" r:id="rId10"/>
-    <p:sldId id="272" r:id="rId11"/>
-    <p:sldId id="273" r:id="rId12"/>
-    <p:sldId id="274" r:id="rId13"/>
-    <p:sldId id="266" r:id="rId14"/>
+    <p:sldId id="276" r:id="rId7"/>
+    <p:sldId id="271" r:id="rId8"/>
+    <p:sldId id="275" r:id="rId9"/>
+    <p:sldId id="269" r:id="rId10"/>
+    <p:sldId id="270" r:id="rId11"/>
+    <p:sldId id="272" r:id="rId12"/>
+    <p:sldId id="273" r:id="rId13"/>
+    <p:sldId id="274" r:id="rId14"/>
+    <p:sldId id="266" r:id="rId15"/>
   </p:sldIdLst>
   <p:sldSz cx="9144000" cy="5143500" type="screen16x9"/>
   <p:notesSz cx="6858000" cy="9144000"/>
   <p:embeddedFontLst>
     <p:embeddedFont>
-      <p:font typeface="Cambria Math" panose="02040503050406030204" pitchFamily="18" charset="0"/>
-      <p:regular r:id="rId16"/>
-    </p:embeddedFont>
-    <p:embeddedFont>
-      <p:font typeface="Calibri" panose="020F0502020204030204" pitchFamily="34" charset="0"/>
+      <p:font typeface="Open Sans" panose="020B0604020202020204" charset="0"/>
       <p:regular r:id="rId17"/>
       <p:bold r:id="rId18"/>
       <p:italic r:id="rId19"/>
       <p:boldItalic r:id="rId20"/>
     </p:embeddedFont>
     <p:embeddedFont>
-      <p:font typeface="Open Sans" panose="020B0604020202020204" charset="0"/>
+      <p:font typeface="PT Sans Narrow" panose="020B0604020202020204" charset="-52"/>
       <p:regular r:id="rId21"/>
       <p:bold r:id="rId22"/>
-      <p:italic r:id="rId23"/>
-      <p:boldItalic r:id="rId24"/>
     </p:embeddedFont>
     <p:embeddedFont>
-      <p:font typeface="PT Sans Narrow" panose="020B0604020202020204" charset="-52"/>
-      <p:regular r:id="rId25"/>
-      <p:bold r:id="rId26"/>
+      <p:font typeface="Cambria Math" panose="02040503050406030204" pitchFamily="18" charset="0"/>
+      <p:regular r:id="rId23"/>
+    </p:embeddedFont>
+    <p:embeddedFont>
+      <p:font typeface="Calibri" panose="020F0502020204030204" pitchFamily="34" charset="0"/>
+      <p:regular r:id="rId24"/>
+      <p:bold r:id="rId25"/>
+      <p:italic r:id="rId26"/>
+      <p:boldItalic r:id="rId27"/>
     </p:embeddedFont>
   </p:embeddedFontLst>
   <p:defaultTextStyle>
@@ -1160,6 +1161,110 @@
 </file>
 
 <file path=ppt/notesSlides/notesSlide13.xml><?xml version="1.0" encoding="utf-8"?>
+<p:notes xmlns:a="http://schemas.openxmlformats.org/drawingml/2006/main" xmlns:r="http://schemas.openxmlformats.org/officeDocument/2006/relationships" xmlns:p="http://schemas.openxmlformats.org/presentationml/2006/main" showMasterSp="0" showMasterPhAnim="0">
+  <p:cSld>
+    <p:spTree>
+      <p:nvGrpSpPr>
+        <p:cNvPr id="1" name="Shape 75"/>
+        <p:cNvGrpSpPr/>
+        <p:nvPr/>
+      </p:nvGrpSpPr>
+      <p:grpSpPr>
+        <a:xfrm>
+          <a:off x="0" y="0"/>
+          <a:ext cx="0" cy="0"/>
+          <a:chOff x="0" y="0"/>
+          <a:chExt cx="0" cy="0"/>
+        </a:xfrm>
+      </p:grpSpPr>
+      <p:sp>
+        <p:nvSpPr>
+          <p:cNvPr id="76" name="Google Shape;76;g2e38e5603a3_0_30:notes"/>
+          <p:cNvSpPr>
+            <a:spLocks noGrp="1" noRot="1" noChangeAspect="1"/>
+          </p:cNvSpPr>
+          <p:nvPr>
+            <p:ph type="sldImg" idx="2"/>
+          </p:nvPr>
+        </p:nvSpPr>
+        <p:spPr>
+          <a:xfrm>
+            <a:off x="381000" y="685800"/>
+            <a:ext cx="6096000" cy="3429000"/>
+          </a:xfrm>
+          <a:custGeom>
+            <a:avLst/>
+            <a:gdLst/>
+            <a:ahLst/>
+            <a:cxnLst/>
+            <a:rect l="l" t="t" r="r" b="b"/>
+            <a:pathLst>
+              <a:path w="120000" h="120000" extrusionOk="0">
+                <a:moveTo>
+                  <a:pt x="0" y="0"/>
+                </a:moveTo>
+                <a:lnTo>
+                  <a:pt x="120000" y="0"/>
+                </a:lnTo>
+                <a:lnTo>
+                  <a:pt x="120000" y="120000"/>
+                </a:lnTo>
+                <a:lnTo>
+                  <a:pt x="0" y="120000"/>
+                </a:lnTo>
+                <a:close/>
+              </a:path>
+            </a:pathLst>
+          </a:custGeom>
+        </p:spPr>
+      </p:sp>
+      <p:sp>
+        <p:nvSpPr>
+          <p:cNvPr id="77" name="Google Shape;77;g2e38e5603a3_0_30:notes"/>
+          <p:cNvSpPr txBox="1">
+            <a:spLocks noGrp="1"/>
+          </p:cNvSpPr>
+          <p:nvPr>
+            <p:ph type="body" idx="1"/>
+          </p:nvPr>
+        </p:nvSpPr>
+        <p:spPr>
+          <a:xfrm>
+            <a:off x="685800" y="4343400"/>
+            <a:ext cx="5486400" cy="4114800"/>
+          </a:xfrm>
+          <a:prstGeom prst="rect">
+            <a:avLst/>
+          </a:prstGeom>
+        </p:spPr>
+        <p:txBody>
+          <a:bodyPr spcFirstLastPara="1" wrap="square" lIns="91425" tIns="91425" rIns="91425" bIns="91425" anchor="t" anchorCtr="0">
+            <a:noAutofit/>
+          </a:bodyPr>
+          <a:lstStyle/>
+          <a:p>
+            <a:pPr marL="0" lvl="0" indent="0" algn="l" rtl="0">
+              <a:spcBef>
+                <a:spcPts val="0"/>
+              </a:spcBef>
+              <a:spcAft>
+                <a:spcPts val="0"/>
+              </a:spcAft>
+              <a:buNone/>
+            </a:pPr>
+            <a:endParaRPr/>
+          </a:p>
+        </p:txBody>
+      </p:sp>
+    </p:spTree>
+  </p:cSld>
+  <p:clrMapOvr>
+    <a:masterClrMapping/>
+  </p:clrMapOvr>
+</p:notes>
+</file>
+
+<file path=ppt/notesSlides/notesSlide14.xml><?xml version="1.0" encoding="utf-8"?>
 <p:notes xmlns:a="http://schemas.openxmlformats.org/drawingml/2006/main" xmlns:r="http://schemas.openxmlformats.org/officeDocument/2006/relationships" xmlns:p="http://schemas.openxmlformats.org/presentationml/2006/main" showMasterSp="0" showMasterPhAnim="0">
   <p:cSld>
     <p:spTree>
@@ -7968,6 +8073,1130 @@
 </file>
 
 <file path=ppt/slides/slide10.xml><?xml version="1.0" encoding="utf-8"?>
+<p:sld xmlns:a="http://schemas.openxmlformats.org/drawingml/2006/main" xmlns:r="http://schemas.openxmlformats.org/officeDocument/2006/relationships" xmlns:p="http://schemas.openxmlformats.org/presentationml/2006/main">
+  <p:cSld>
+    <p:spTree>
+      <p:nvGrpSpPr>
+        <p:cNvPr id="1" name="Shape 78"/>
+        <p:cNvGrpSpPr/>
+        <p:nvPr/>
+      </p:nvGrpSpPr>
+      <p:grpSpPr>
+        <a:xfrm>
+          <a:off x="0" y="0"/>
+          <a:ext cx="0" cy="0"/>
+          <a:chOff x="0" y="0"/>
+          <a:chExt cx="0" cy="0"/>
+        </a:xfrm>
+      </p:grpSpPr>
+      <p:sp>
+        <p:nvSpPr>
+          <p:cNvPr id="79" name="Google Shape;79;p15"/>
+          <p:cNvSpPr txBox="1">
+            <a:spLocks noGrp="1"/>
+          </p:cNvSpPr>
+          <p:nvPr>
+            <p:ph type="title"/>
+          </p:nvPr>
+        </p:nvSpPr>
+        <p:spPr>
+          <a:xfrm>
+            <a:off x="311700" y="445025"/>
+            <a:ext cx="3999908" cy="707400"/>
+          </a:xfrm>
+          <a:prstGeom prst="rect">
+            <a:avLst/>
+          </a:prstGeom>
+        </p:spPr>
+        <p:txBody>
+          <a:bodyPr spcFirstLastPara="1" wrap="square" lIns="91425" tIns="91425" rIns="91425" bIns="91425" anchor="t" anchorCtr="0">
+            <a:normAutofit fontScale="90000"/>
+          </a:bodyPr>
+          <a:lstStyle/>
+          <a:p>
+            <a:pPr lvl="0"/>
+            <a:r>
+              <a:rPr lang="ru-RU" dirty="0">
+                <a:solidFill>
+                  <a:srgbClr val="3D85C6"/>
+                </a:solidFill>
+              </a:rPr>
+              <a:t>Метрики</a:t>
+            </a:r>
+          </a:p>
+        </p:txBody>
+      </p:sp>
+      <mc:AlternateContent xmlns:mc="http://schemas.openxmlformats.org/markup-compatibility/2006" xmlns:a14="http://schemas.microsoft.com/office/drawing/2010/main">
+        <mc:Choice Requires="a14">
+          <p:sp>
+            <p:nvSpPr>
+              <p:cNvPr id="10" name="Google Shape;73;p14"/>
+              <p:cNvSpPr txBox="1">
+                <a:spLocks noGrp="1"/>
+              </p:cNvSpPr>
+              <p:nvPr>
+                <p:ph type="body" idx="1"/>
+              </p:nvPr>
+            </p:nvSpPr>
+            <p:spPr>
+              <a:xfrm>
+                <a:off x="402534" y="1353381"/>
+                <a:ext cx="3456103" cy="1273087"/>
+              </a:xfrm>
+              <a:prstGeom prst="rect">
+                <a:avLst/>
+              </a:prstGeom>
+            </p:spPr>
+            <p:txBody>
+              <a:bodyPr spcFirstLastPara="1" wrap="square" lIns="91425" tIns="91425" rIns="91425" bIns="91425" anchor="t" anchorCtr="0">
+                <a:noAutofit/>
+              </a:bodyPr>
+              <a:lstStyle/>
+              <a:p>
+                <a:r>
+                  <a:rPr lang="uk-UA" sz="1200" dirty="0"/>
+                  <a:t>Коефіцієнт прохідності</a:t>
+                </a:r>
+              </a:p>
+              <a:p>
+                <a:endParaRPr lang="uk-UA" sz="1200" dirty="0"/>
+              </a:p>
+              <a:p>
+                <a:pPr marL="0" indent="0">
+                  <a:buNone/>
+                </a:pPr>
+                <a14:m>
+                  <m:oMathPara xmlns:m="http://schemas.openxmlformats.org/officeDocument/2006/math">
+                    <m:oMathParaPr>
+                      <m:jc m:val="centerGroup"/>
+                    </m:oMathParaPr>
+                    <m:oMath xmlns:m="http://schemas.openxmlformats.org/officeDocument/2006/math">
+                      <m:r>
+                        <a:rPr lang="uk-UA" sz="1200" i="1">
+                          <a:latin typeface="Cambria Math"/>
+                        </a:rPr>
+                        <m:t>𝑊</m:t>
+                      </m:r>
+                      <m:r>
+                        <a:rPr lang="uk-UA" sz="1200" i="1">
+                          <a:latin typeface="Cambria Math"/>
+                        </a:rPr>
+                        <m:t>=</m:t>
+                      </m:r>
+                      <m:f>
+                        <m:fPr>
+                          <m:ctrlPr>
+                            <a:rPr lang="ru-RU" sz="1200" i="1">
+                              <a:latin typeface="Cambria Math"/>
+                            </a:rPr>
+                          </m:ctrlPr>
+                        </m:fPr>
+                        <m:num>
+                          <m:sSub>
+                            <m:sSubPr>
+                              <m:ctrlPr>
+                                <a:rPr lang="ru-RU" sz="1200" i="1">
+                                  <a:latin typeface="Cambria Math"/>
+                                </a:rPr>
+                              </m:ctrlPr>
+                            </m:sSubPr>
+                            <m:e>
+                              <m:r>
+                                <a:rPr lang="uk-UA" sz="1200" i="1">
+                                  <a:latin typeface="Cambria Math"/>
+                                </a:rPr>
+                                <m:t>𝑁</m:t>
+                              </m:r>
+                            </m:e>
+                            <m:sub>
+                              <m:r>
+                                <a:rPr lang="uk-UA" sz="1200" i="1">
+                                  <a:latin typeface="Cambria Math"/>
+                                </a:rPr>
+                                <m:t>𝑓𝑙𝑜𝑜𝑟</m:t>
+                              </m:r>
+                            </m:sub>
+                          </m:sSub>
+                        </m:num>
+                        <m:den>
+                          <m:sSub>
+                            <m:sSubPr>
+                              <m:ctrlPr>
+                                <a:rPr lang="ru-RU" sz="1200" i="1">
+                                  <a:latin typeface="Cambria Math"/>
+                                </a:rPr>
+                              </m:ctrlPr>
+                            </m:sSubPr>
+                            <m:e>
+                              <m:r>
+                                <a:rPr lang="uk-UA" sz="1200" i="1">
+                                  <a:latin typeface="Cambria Math"/>
+                                </a:rPr>
+                                <m:t>𝑁</m:t>
+                              </m:r>
+                            </m:e>
+                            <m:sub>
+                              <m:r>
+                                <a:rPr lang="uk-UA" sz="1200" i="1">
+                                  <a:latin typeface="Cambria Math"/>
+                                </a:rPr>
+                                <m:t>𝑡𝑜𝑡𝑎𝑙</m:t>
+                              </m:r>
+                            </m:sub>
+                          </m:sSub>
+                        </m:den>
+                      </m:f>
+                    </m:oMath>
+                  </m:oMathPara>
+                </a14:m>
+                <a:endParaRPr lang="uk-UA" sz="1200" dirty="0"/>
+              </a:p>
+            </p:txBody>
+          </p:sp>
+        </mc:Choice>
+        <mc:Fallback xmlns="">
+          <p:sp>
+            <p:nvSpPr>
+              <p:cNvPr id="10" name="Google Shape;73;p14"/>
+              <p:cNvSpPr txBox="1">
+                <a:spLocks noGrp="1" noRot="1" noChangeAspect="1" noMove="1" noResize="1" noEditPoints="1" noAdjustHandles="1" noChangeArrowheads="1" noChangeShapeType="1" noTextEdit="1"/>
+              </p:cNvSpPr>
+              <p:nvPr>
+                <p:ph type="body" idx="1"/>
+              </p:nvPr>
+            </p:nvSpPr>
+            <p:spPr>
+              <a:xfrm>
+                <a:off x="402534" y="1353381"/>
+                <a:ext cx="3456103" cy="1273087"/>
+              </a:xfrm>
+              <a:prstGeom prst="rect">
+                <a:avLst/>
+              </a:prstGeom>
+              <a:blipFill rotWithShape="1">
+                <a:blip r:embed="rId3"/>
+                <a:stretch>
+                  <a:fillRect t="-1435"/>
+                </a:stretch>
+              </a:blipFill>
+            </p:spPr>
+            <p:txBody>
+              <a:bodyPr/>
+              <a:lstStyle/>
+              <a:p>
+                <a:r>
+                  <a:rPr lang="ru-RU">
+                    <a:noFill/>
+                  </a:rPr>
+                  <a:t> </a:t>
+                </a:r>
+              </a:p>
+            </p:txBody>
+          </p:sp>
+        </mc:Fallback>
+      </mc:AlternateContent>
+      <mc:AlternateContent xmlns:mc="http://schemas.openxmlformats.org/markup-compatibility/2006" xmlns:a14="http://schemas.microsoft.com/office/drawing/2010/main">
+        <mc:Choice Requires="a14">
+          <p:sp>
+            <p:nvSpPr>
+              <p:cNvPr id="11" name="Google Shape;73;p14"/>
+              <p:cNvSpPr txBox="1">
+                <a:spLocks/>
+              </p:cNvSpPr>
+              <p:nvPr/>
+            </p:nvSpPr>
+            <p:spPr>
+              <a:xfrm>
+                <a:off x="477112" y="2951959"/>
+                <a:ext cx="3456103" cy="1273087"/>
+              </a:xfrm>
+              <a:prstGeom prst="rect">
+                <a:avLst/>
+              </a:prstGeom>
+              <a:noFill/>
+              <a:ln>
+                <a:noFill/>
+              </a:ln>
+            </p:spPr>
+            <p:txBody>
+              <a:bodyPr spcFirstLastPara="1" wrap="square" lIns="91425" tIns="91425" rIns="91425" bIns="91425" anchor="t" anchorCtr="0">
+                <a:noAutofit/>
+              </a:bodyPr>
+              <a:lstStyle>
+                <a:defPPr marR="0" lvl="0" algn="l" rtl="0">
+                  <a:lnSpc>
+                    <a:spcPct val="100000"/>
+                  </a:lnSpc>
+                  <a:spcBef>
+                    <a:spcPts val="0"/>
+                  </a:spcBef>
+                  <a:spcAft>
+                    <a:spcPts val="0"/>
+                  </a:spcAft>
+                </a:defPPr>
+                <a:lvl1pPr marL="457200" marR="0" lvl="0" indent="-342900" algn="l" rtl="0">
+                  <a:lnSpc>
+                    <a:spcPct val="115000"/>
+                  </a:lnSpc>
+                  <a:spcBef>
+                    <a:spcPts val="0"/>
+                  </a:spcBef>
+                  <a:spcAft>
+                    <a:spcPts val="0"/>
+                  </a:spcAft>
+                  <a:buClr>
+                    <a:schemeClr val="dk2"/>
+                  </a:buClr>
+                  <a:buSzPts val="1800"/>
+                  <a:buFont typeface="Open Sans"/>
+                  <a:buChar char="●"/>
+                  <a:defRPr sz="1800" b="0" i="0" u="none" strike="noStrike" cap="none">
+                    <a:solidFill>
+                      <a:schemeClr val="dk2"/>
+                    </a:solidFill>
+                    <a:latin typeface="Open Sans"/>
+                    <a:ea typeface="Open Sans"/>
+                    <a:cs typeface="Open Sans"/>
+                    <a:sym typeface="Open Sans"/>
+                  </a:defRPr>
+                </a:lvl1pPr>
+                <a:lvl2pPr marL="914400" marR="0" lvl="1" indent="-317500" algn="l" rtl="0">
+                  <a:lnSpc>
+                    <a:spcPct val="115000"/>
+                  </a:lnSpc>
+                  <a:spcBef>
+                    <a:spcPts val="0"/>
+                  </a:spcBef>
+                  <a:spcAft>
+                    <a:spcPts val="0"/>
+                  </a:spcAft>
+                  <a:buClr>
+                    <a:schemeClr val="dk2"/>
+                  </a:buClr>
+                  <a:buSzPts val="1400"/>
+                  <a:buFont typeface="Open Sans"/>
+                  <a:buChar char="○"/>
+                  <a:defRPr sz="1400" b="0" i="0" u="none" strike="noStrike" cap="none">
+                    <a:solidFill>
+                      <a:schemeClr val="dk2"/>
+                    </a:solidFill>
+                    <a:latin typeface="Open Sans"/>
+                    <a:ea typeface="Open Sans"/>
+                    <a:cs typeface="Open Sans"/>
+                    <a:sym typeface="Open Sans"/>
+                  </a:defRPr>
+                </a:lvl2pPr>
+                <a:lvl3pPr marL="1371600" marR="0" lvl="2" indent="-317500" algn="l" rtl="0">
+                  <a:lnSpc>
+                    <a:spcPct val="115000"/>
+                  </a:lnSpc>
+                  <a:spcBef>
+                    <a:spcPts val="0"/>
+                  </a:spcBef>
+                  <a:spcAft>
+                    <a:spcPts val="0"/>
+                  </a:spcAft>
+                  <a:buClr>
+                    <a:schemeClr val="dk2"/>
+                  </a:buClr>
+                  <a:buSzPts val="1400"/>
+                  <a:buFont typeface="Open Sans"/>
+                  <a:buChar char="■"/>
+                  <a:defRPr sz="1400" b="0" i="0" u="none" strike="noStrike" cap="none">
+                    <a:solidFill>
+                      <a:schemeClr val="dk2"/>
+                    </a:solidFill>
+                    <a:latin typeface="Open Sans"/>
+                    <a:ea typeface="Open Sans"/>
+                    <a:cs typeface="Open Sans"/>
+                    <a:sym typeface="Open Sans"/>
+                  </a:defRPr>
+                </a:lvl3pPr>
+                <a:lvl4pPr marL="1828800" marR="0" lvl="3" indent="-317500" algn="l" rtl="0">
+                  <a:lnSpc>
+                    <a:spcPct val="115000"/>
+                  </a:lnSpc>
+                  <a:spcBef>
+                    <a:spcPts val="0"/>
+                  </a:spcBef>
+                  <a:spcAft>
+                    <a:spcPts val="0"/>
+                  </a:spcAft>
+                  <a:buClr>
+                    <a:schemeClr val="dk2"/>
+                  </a:buClr>
+                  <a:buSzPts val="1400"/>
+                  <a:buFont typeface="Open Sans"/>
+                  <a:buChar char="●"/>
+                  <a:defRPr sz="1400" b="0" i="0" u="none" strike="noStrike" cap="none">
+                    <a:solidFill>
+                      <a:schemeClr val="dk2"/>
+                    </a:solidFill>
+                    <a:latin typeface="Open Sans"/>
+                    <a:ea typeface="Open Sans"/>
+                    <a:cs typeface="Open Sans"/>
+                    <a:sym typeface="Open Sans"/>
+                  </a:defRPr>
+                </a:lvl4pPr>
+                <a:lvl5pPr marL="2286000" marR="0" lvl="4" indent="-317500" algn="l" rtl="0">
+                  <a:lnSpc>
+                    <a:spcPct val="115000"/>
+                  </a:lnSpc>
+                  <a:spcBef>
+                    <a:spcPts val="0"/>
+                  </a:spcBef>
+                  <a:spcAft>
+                    <a:spcPts val="0"/>
+                  </a:spcAft>
+                  <a:buClr>
+                    <a:schemeClr val="dk2"/>
+                  </a:buClr>
+                  <a:buSzPts val="1400"/>
+                  <a:buFont typeface="Open Sans"/>
+                  <a:buChar char="○"/>
+                  <a:defRPr sz="1400" b="0" i="0" u="none" strike="noStrike" cap="none">
+                    <a:solidFill>
+                      <a:schemeClr val="dk2"/>
+                    </a:solidFill>
+                    <a:latin typeface="Open Sans"/>
+                    <a:ea typeface="Open Sans"/>
+                    <a:cs typeface="Open Sans"/>
+                    <a:sym typeface="Open Sans"/>
+                  </a:defRPr>
+                </a:lvl5pPr>
+                <a:lvl6pPr marL="2743200" marR="0" lvl="5" indent="-317500" algn="l" rtl="0">
+                  <a:lnSpc>
+                    <a:spcPct val="115000"/>
+                  </a:lnSpc>
+                  <a:spcBef>
+                    <a:spcPts val="0"/>
+                  </a:spcBef>
+                  <a:spcAft>
+                    <a:spcPts val="0"/>
+                  </a:spcAft>
+                  <a:buClr>
+                    <a:schemeClr val="dk2"/>
+                  </a:buClr>
+                  <a:buSzPts val="1400"/>
+                  <a:buFont typeface="Open Sans"/>
+                  <a:buChar char="■"/>
+                  <a:defRPr sz="1400" b="0" i="0" u="none" strike="noStrike" cap="none">
+                    <a:solidFill>
+                      <a:schemeClr val="dk2"/>
+                    </a:solidFill>
+                    <a:latin typeface="Open Sans"/>
+                    <a:ea typeface="Open Sans"/>
+                    <a:cs typeface="Open Sans"/>
+                    <a:sym typeface="Open Sans"/>
+                  </a:defRPr>
+                </a:lvl6pPr>
+                <a:lvl7pPr marL="3200400" marR="0" lvl="6" indent="-317500" algn="l" rtl="0">
+                  <a:lnSpc>
+                    <a:spcPct val="115000"/>
+                  </a:lnSpc>
+                  <a:spcBef>
+                    <a:spcPts val="0"/>
+                  </a:spcBef>
+                  <a:spcAft>
+                    <a:spcPts val="0"/>
+                  </a:spcAft>
+                  <a:buClr>
+                    <a:schemeClr val="dk2"/>
+                  </a:buClr>
+                  <a:buSzPts val="1400"/>
+                  <a:buFont typeface="Open Sans"/>
+                  <a:buChar char="●"/>
+                  <a:defRPr sz="1400" b="0" i="0" u="none" strike="noStrike" cap="none">
+                    <a:solidFill>
+                      <a:schemeClr val="dk2"/>
+                    </a:solidFill>
+                    <a:latin typeface="Open Sans"/>
+                    <a:ea typeface="Open Sans"/>
+                    <a:cs typeface="Open Sans"/>
+                    <a:sym typeface="Open Sans"/>
+                  </a:defRPr>
+                </a:lvl7pPr>
+                <a:lvl8pPr marL="3657600" marR="0" lvl="7" indent="-317500" algn="l" rtl="0">
+                  <a:lnSpc>
+                    <a:spcPct val="115000"/>
+                  </a:lnSpc>
+                  <a:spcBef>
+                    <a:spcPts val="0"/>
+                  </a:spcBef>
+                  <a:spcAft>
+                    <a:spcPts val="0"/>
+                  </a:spcAft>
+                  <a:buClr>
+                    <a:schemeClr val="dk2"/>
+                  </a:buClr>
+                  <a:buSzPts val="1400"/>
+                  <a:buFont typeface="Open Sans"/>
+                  <a:buChar char="○"/>
+                  <a:defRPr sz="1400" b="0" i="0" u="none" strike="noStrike" cap="none">
+                    <a:solidFill>
+                      <a:schemeClr val="dk2"/>
+                    </a:solidFill>
+                    <a:latin typeface="Open Sans"/>
+                    <a:ea typeface="Open Sans"/>
+                    <a:cs typeface="Open Sans"/>
+                    <a:sym typeface="Open Sans"/>
+                  </a:defRPr>
+                </a:lvl8pPr>
+                <a:lvl9pPr marL="4114800" marR="0" lvl="8" indent="-317500" algn="l" rtl="0">
+                  <a:lnSpc>
+                    <a:spcPct val="115000"/>
+                  </a:lnSpc>
+                  <a:spcBef>
+                    <a:spcPts val="0"/>
+                  </a:spcBef>
+                  <a:spcAft>
+                    <a:spcPts val="0"/>
+                  </a:spcAft>
+                  <a:buClr>
+                    <a:schemeClr val="dk2"/>
+                  </a:buClr>
+                  <a:buSzPts val="1400"/>
+                  <a:buFont typeface="Open Sans"/>
+                  <a:buChar char="■"/>
+                  <a:defRPr sz="1400" b="0" i="0" u="none" strike="noStrike" cap="none">
+                    <a:solidFill>
+                      <a:schemeClr val="dk2"/>
+                    </a:solidFill>
+                    <a:latin typeface="Open Sans"/>
+                    <a:ea typeface="Open Sans"/>
+                    <a:cs typeface="Open Sans"/>
+                    <a:sym typeface="Open Sans"/>
+                  </a:defRPr>
+                </a:lvl9pPr>
+              </a:lstStyle>
+              <a:p>
+                <a:r>
+                  <a:rPr lang="uk-UA" sz="1200" dirty="0"/>
+                  <a:t>Прямолінійність меж</a:t>
+                </a:r>
+              </a:p>
+              <a:p>
+                <a:endParaRPr lang="uk-UA" sz="1200" dirty="0"/>
+              </a:p>
+              <a:p>
+                <a:pPr marL="0" indent="0">
+                  <a:buNone/>
+                </a:pPr>
+                <a14:m>
+                  <m:oMathPara xmlns:m="http://schemas.openxmlformats.org/officeDocument/2006/math">
+                    <m:oMathParaPr>
+                      <m:jc m:val="centerGroup"/>
+                    </m:oMathParaPr>
+                    <m:oMath xmlns:m="http://schemas.openxmlformats.org/officeDocument/2006/math">
+                      <m:r>
+                        <a:rPr lang="uk-UA" sz="1200" i="1">
+                          <a:latin typeface="Cambria Math"/>
+                        </a:rPr>
+                        <m:t>𝑆</m:t>
+                      </m:r>
+                      <m:r>
+                        <a:rPr lang="uk-UA" sz="1200" i="1">
+                          <a:latin typeface="Cambria Math"/>
+                        </a:rPr>
+                        <m:t>=</m:t>
+                      </m:r>
+                      <m:f>
+                        <m:fPr>
+                          <m:ctrlPr>
+                            <a:rPr lang="ru-RU" sz="1200" i="1">
+                              <a:latin typeface="Cambria Math"/>
+                            </a:rPr>
+                          </m:ctrlPr>
+                        </m:fPr>
+                        <m:num>
+                          <m:sSub>
+                            <m:sSubPr>
+                              <m:ctrlPr>
+                                <a:rPr lang="ru-RU" sz="1200" i="1">
+                                  <a:latin typeface="Cambria Math"/>
+                                </a:rPr>
+                              </m:ctrlPr>
+                            </m:sSubPr>
+                            <m:e>
+                              <m:r>
+                                <a:rPr lang="uk-UA" sz="1200" i="1">
+                                  <a:latin typeface="Cambria Math"/>
+                                </a:rPr>
+                                <m:t>𝐿</m:t>
+                              </m:r>
+                            </m:e>
+                            <m:sub>
+                              <m:r>
+                                <a:rPr lang="uk-UA" sz="1200" i="1">
+                                  <a:latin typeface="Cambria Math"/>
+                                </a:rPr>
+                                <m:t>𝑠𝑡𝑟𝑎𝑖𝑔h𝑡</m:t>
+                              </m:r>
+                            </m:sub>
+                          </m:sSub>
+                        </m:num>
+                        <m:den>
+                          <m:sSub>
+                            <m:sSubPr>
+                              <m:ctrlPr>
+                                <a:rPr lang="ru-RU" sz="1200" i="1">
+                                  <a:latin typeface="Cambria Math"/>
+                                </a:rPr>
+                              </m:ctrlPr>
+                            </m:sSubPr>
+                            <m:e>
+                              <m:r>
+                                <a:rPr lang="uk-UA" sz="1200" i="1">
+                                  <a:latin typeface="Cambria Math"/>
+                                </a:rPr>
+                                <m:t>𝑁</m:t>
+                              </m:r>
+                            </m:e>
+                            <m:sub>
+                              <m:r>
+                                <a:rPr lang="uk-UA" sz="1200" i="1">
+                                  <a:latin typeface="Cambria Math"/>
+                                </a:rPr>
+                                <m:t>𝑐𝑜𝑛𝑡𝑜𝑢𝑟</m:t>
+                              </m:r>
+                            </m:sub>
+                          </m:sSub>
+                        </m:den>
+                      </m:f>
+                    </m:oMath>
+                  </m:oMathPara>
+                </a14:m>
+                <a:endParaRPr lang="ru-RU" sz="1200" dirty="0"/>
+              </a:p>
+            </p:txBody>
+          </p:sp>
+        </mc:Choice>
+        <mc:Fallback xmlns="">
+          <p:sp>
+            <p:nvSpPr>
+              <p:cNvPr id="11" name="Google Shape;73;p14"/>
+              <p:cNvSpPr txBox="1">
+                <a:spLocks noRot="1" noChangeAspect="1" noMove="1" noResize="1" noEditPoints="1" noAdjustHandles="1" noChangeArrowheads="1" noChangeShapeType="1" noTextEdit="1"/>
+              </p:cNvSpPr>
+              <p:nvPr/>
+            </p:nvSpPr>
+            <p:spPr>
+              <a:xfrm>
+                <a:off x="477112" y="2951959"/>
+                <a:ext cx="3456103" cy="1273087"/>
+              </a:xfrm>
+              <a:prstGeom prst="rect">
+                <a:avLst/>
+              </a:prstGeom>
+              <a:blipFill rotWithShape="1">
+                <a:blip r:embed="rId4"/>
+                <a:stretch>
+                  <a:fillRect t="-1435"/>
+                </a:stretch>
+              </a:blipFill>
+              <a:ln>
+                <a:noFill/>
+              </a:ln>
+            </p:spPr>
+            <p:txBody>
+              <a:bodyPr/>
+              <a:lstStyle/>
+              <a:p>
+                <a:r>
+                  <a:rPr lang="ru-RU">
+                    <a:noFill/>
+                  </a:rPr>
+                  <a:t> </a:t>
+                </a:r>
+              </a:p>
+            </p:txBody>
+          </p:sp>
+        </mc:Fallback>
+      </mc:AlternateContent>
+      <mc:AlternateContent xmlns:mc="http://schemas.openxmlformats.org/markup-compatibility/2006" xmlns:a14="http://schemas.microsoft.com/office/drawing/2010/main">
+        <mc:Choice Requires="a14">
+          <p:sp>
+            <p:nvSpPr>
+              <p:cNvPr id="12" name="Google Shape;73;p14"/>
+              <p:cNvSpPr txBox="1">
+                <a:spLocks/>
+              </p:cNvSpPr>
+              <p:nvPr/>
+            </p:nvSpPr>
+            <p:spPr>
+              <a:xfrm>
+                <a:off x="3573750" y="1282044"/>
+                <a:ext cx="3456103" cy="1804867"/>
+              </a:xfrm>
+              <a:prstGeom prst="rect">
+                <a:avLst/>
+              </a:prstGeom>
+              <a:noFill/>
+              <a:ln>
+                <a:noFill/>
+              </a:ln>
+            </p:spPr>
+            <p:txBody>
+              <a:bodyPr spcFirstLastPara="1" wrap="square" lIns="91425" tIns="91425" rIns="91425" bIns="91425" anchor="t" anchorCtr="0">
+                <a:noAutofit/>
+              </a:bodyPr>
+              <a:lstStyle>
+                <a:defPPr marR="0" lvl="0" algn="l" rtl="0">
+                  <a:lnSpc>
+                    <a:spcPct val="100000"/>
+                  </a:lnSpc>
+                  <a:spcBef>
+                    <a:spcPts val="0"/>
+                  </a:spcBef>
+                  <a:spcAft>
+                    <a:spcPts val="0"/>
+                  </a:spcAft>
+                </a:defPPr>
+                <a:lvl1pPr marL="457200" marR="0" lvl="0" indent="-342900" algn="l" rtl="0">
+                  <a:lnSpc>
+                    <a:spcPct val="115000"/>
+                  </a:lnSpc>
+                  <a:spcBef>
+                    <a:spcPts val="0"/>
+                  </a:spcBef>
+                  <a:spcAft>
+                    <a:spcPts val="0"/>
+                  </a:spcAft>
+                  <a:buClr>
+                    <a:schemeClr val="dk2"/>
+                  </a:buClr>
+                  <a:buSzPts val="1800"/>
+                  <a:buFont typeface="Open Sans"/>
+                  <a:buChar char="●"/>
+                  <a:defRPr sz="1800" b="0" i="0" u="none" strike="noStrike" cap="none">
+                    <a:solidFill>
+                      <a:schemeClr val="dk2"/>
+                    </a:solidFill>
+                    <a:latin typeface="Open Sans"/>
+                    <a:ea typeface="Open Sans"/>
+                    <a:cs typeface="Open Sans"/>
+                    <a:sym typeface="Open Sans"/>
+                  </a:defRPr>
+                </a:lvl1pPr>
+                <a:lvl2pPr marL="914400" marR="0" lvl="1" indent="-317500" algn="l" rtl="0">
+                  <a:lnSpc>
+                    <a:spcPct val="115000"/>
+                  </a:lnSpc>
+                  <a:spcBef>
+                    <a:spcPts val="0"/>
+                  </a:spcBef>
+                  <a:spcAft>
+                    <a:spcPts val="0"/>
+                  </a:spcAft>
+                  <a:buClr>
+                    <a:schemeClr val="dk2"/>
+                  </a:buClr>
+                  <a:buSzPts val="1400"/>
+                  <a:buFont typeface="Open Sans"/>
+                  <a:buChar char="○"/>
+                  <a:defRPr sz="1400" b="0" i="0" u="none" strike="noStrike" cap="none">
+                    <a:solidFill>
+                      <a:schemeClr val="dk2"/>
+                    </a:solidFill>
+                    <a:latin typeface="Open Sans"/>
+                    <a:ea typeface="Open Sans"/>
+                    <a:cs typeface="Open Sans"/>
+                    <a:sym typeface="Open Sans"/>
+                  </a:defRPr>
+                </a:lvl2pPr>
+                <a:lvl3pPr marL="1371600" marR="0" lvl="2" indent="-317500" algn="l" rtl="0">
+                  <a:lnSpc>
+                    <a:spcPct val="115000"/>
+                  </a:lnSpc>
+                  <a:spcBef>
+                    <a:spcPts val="0"/>
+                  </a:spcBef>
+                  <a:spcAft>
+                    <a:spcPts val="0"/>
+                  </a:spcAft>
+                  <a:buClr>
+                    <a:schemeClr val="dk2"/>
+                  </a:buClr>
+                  <a:buSzPts val="1400"/>
+                  <a:buFont typeface="Open Sans"/>
+                  <a:buChar char="■"/>
+                  <a:defRPr sz="1400" b="0" i="0" u="none" strike="noStrike" cap="none">
+                    <a:solidFill>
+                      <a:schemeClr val="dk2"/>
+                    </a:solidFill>
+                    <a:latin typeface="Open Sans"/>
+                    <a:ea typeface="Open Sans"/>
+                    <a:cs typeface="Open Sans"/>
+                    <a:sym typeface="Open Sans"/>
+                  </a:defRPr>
+                </a:lvl3pPr>
+                <a:lvl4pPr marL="1828800" marR="0" lvl="3" indent="-317500" algn="l" rtl="0">
+                  <a:lnSpc>
+                    <a:spcPct val="115000"/>
+                  </a:lnSpc>
+                  <a:spcBef>
+                    <a:spcPts val="0"/>
+                  </a:spcBef>
+                  <a:spcAft>
+                    <a:spcPts val="0"/>
+                  </a:spcAft>
+                  <a:buClr>
+                    <a:schemeClr val="dk2"/>
+                  </a:buClr>
+                  <a:buSzPts val="1400"/>
+                  <a:buFont typeface="Open Sans"/>
+                  <a:buChar char="●"/>
+                  <a:defRPr sz="1400" b="0" i="0" u="none" strike="noStrike" cap="none">
+                    <a:solidFill>
+                      <a:schemeClr val="dk2"/>
+                    </a:solidFill>
+                    <a:latin typeface="Open Sans"/>
+                    <a:ea typeface="Open Sans"/>
+                    <a:cs typeface="Open Sans"/>
+                    <a:sym typeface="Open Sans"/>
+                  </a:defRPr>
+                </a:lvl4pPr>
+                <a:lvl5pPr marL="2286000" marR="0" lvl="4" indent="-317500" algn="l" rtl="0">
+                  <a:lnSpc>
+                    <a:spcPct val="115000"/>
+                  </a:lnSpc>
+                  <a:spcBef>
+                    <a:spcPts val="0"/>
+                  </a:spcBef>
+                  <a:spcAft>
+                    <a:spcPts val="0"/>
+                  </a:spcAft>
+                  <a:buClr>
+                    <a:schemeClr val="dk2"/>
+                  </a:buClr>
+                  <a:buSzPts val="1400"/>
+                  <a:buFont typeface="Open Sans"/>
+                  <a:buChar char="○"/>
+                  <a:defRPr sz="1400" b="0" i="0" u="none" strike="noStrike" cap="none">
+                    <a:solidFill>
+                      <a:schemeClr val="dk2"/>
+                    </a:solidFill>
+                    <a:latin typeface="Open Sans"/>
+                    <a:ea typeface="Open Sans"/>
+                    <a:cs typeface="Open Sans"/>
+                    <a:sym typeface="Open Sans"/>
+                  </a:defRPr>
+                </a:lvl5pPr>
+                <a:lvl6pPr marL="2743200" marR="0" lvl="5" indent="-317500" algn="l" rtl="0">
+                  <a:lnSpc>
+                    <a:spcPct val="115000"/>
+                  </a:lnSpc>
+                  <a:spcBef>
+                    <a:spcPts val="0"/>
+                  </a:spcBef>
+                  <a:spcAft>
+                    <a:spcPts val="0"/>
+                  </a:spcAft>
+                  <a:buClr>
+                    <a:schemeClr val="dk2"/>
+                  </a:buClr>
+                  <a:buSzPts val="1400"/>
+                  <a:buFont typeface="Open Sans"/>
+                  <a:buChar char="■"/>
+                  <a:defRPr sz="1400" b="0" i="0" u="none" strike="noStrike" cap="none">
+                    <a:solidFill>
+                      <a:schemeClr val="dk2"/>
+                    </a:solidFill>
+                    <a:latin typeface="Open Sans"/>
+                    <a:ea typeface="Open Sans"/>
+                    <a:cs typeface="Open Sans"/>
+                    <a:sym typeface="Open Sans"/>
+                  </a:defRPr>
+                </a:lvl6pPr>
+                <a:lvl7pPr marL="3200400" marR="0" lvl="6" indent="-317500" algn="l" rtl="0">
+                  <a:lnSpc>
+                    <a:spcPct val="115000"/>
+                  </a:lnSpc>
+                  <a:spcBef>
+                    <a:spcPts val="0"/>
+                  </a:spcBef>
+                  <a:spcAft>
+                    <a:spcPts val="0"/>
+                  </a:spcAft>
+                  <a:buClr>
+                    <a:schemeClr val="dk2"/>
+                  </a:buClr>
+                  <a:buSzPts val="1400"/>
+                  <a:buFont typeface="Open Sans"/>
+                  <a:buChar char="●"/>
+                  <a:defRPr sz="1400" b="0" i="0" u="none" strike="noStrike" cap="none">
+                    <a:solidFill>
+                      <a:schemeClr val="dk2"/>
+                    </a:solidFill>
+                    <a:latin typeface="Open Sans"/>
+                    <a:ea typeface="Open Sans"/>
+                    <a:cs typeface="Open Sans"/>
+                    <a:sym typeface="Open Sans"/>
+                  </a:defRPr>
+                </a:lvl7pPr>
+                <a:lvl8pPr marL="3657600" marR="0" lvl="7" indent="-317500" algn="l" rtl="0">
+                  <a:lnSpc>
+                    <a:spcPct val="115000"/>
+                  </a:lnSpc>
+                  <a:spcBef>
+                    <a:spcPts val="0"/>
+                  </a:spcBef>
+                  <a:spcAft>
+                    <a:spcPts val="0"/>
+                  </a:spcAft>
+                  <a:buClr>
+                    <a:schemeClr val="dk2"/>
+                  </a:buClr>
+                  <a:buSzPts val="1400"/>
+                  <a:buFont typeface="Open Sans"/>
+                  <a:buChar char="○"/>
+                  <a:defRPr sz="1400" b="0" i="0" u="none" strike="noStrike" cap="none">
+                    <a:solidFill>
+                      <a:schemeClr val="dk2"/>
+                    </a:solidFill>
+                    <a:latin typeface="Open Sans"/>
+                    <a:ea typeface="Open Sans"/>
+                    <a:cs typeface="Open Sans"/>
+                    <a:sym typeface="Open Sans"/>
+                  </a:defRPr>
+                </a:lvl8pPr>
+                <a:lvl9pPr marL="4114800" marR="0" lvl="8" indent="-317500" algn="l" rtl="0">
+                  <a:lnSpc>
+                    <a:spcPct val="115000"/>
+                  </a:lnSpc>
+                  <a:spcBef>
+                    <a:spcPts val="0"/>
+                  </a:spcBef>
+                  <a:spcAft>
+                    <a:spcPts val="0"/>
+                  </a:spcAft>
+                  <a:buClr>
+                    <a:schemeClr val="dk2"/>
+                  </a:buClr>
+                  <a:buSzPts val="1400"/>
+                  <a:buFont typeface="Open Sans"/>
+                  <a:buChar char="■"/>
+                  <a:defRPr sz="1400" b="0" i="0" u="none" strike="noStrike" cap="none">
+                    <a:solidFill>
+                      <a:schemeClr val="dk2"/>
+                    </a:solidFill>
+                    <a:latin typeface="Open Sans"/>
+                    <a:ea typeface="Open Sans"/>
+                    <a:cs typeface="Open Sans"/>
+                    <a:sym typeface="Open Sans"/>
+                  </a:defRPr>
+                </a:lvl9pPr>
+              </a:lstStyle>
+              <a:p>
+                <a:r>
+                  <a:rPr lang="uk-UA" sz="1200" dirty="0"/>
+                  <a:t>Кількість компонент </a:t>
+                </a:r>
+                <a:r>
+                  <a:rPr lang="uk-UA" sz="1200" dirty="0" smtClean="0"/>
+                  <a:t>зв’язності</a:t>
+                </a:r>
+              </a:p>
+              <a:p>
+                <a:endParaRPr lang="uk-UA" sz="1200" dirty="0"/>
+              </a:p>
+              <a:p>
+                <a:r>
+                  <a:rPr lang="uk-UA" sz="1200" dirty="0"/>
+                  <a:t>Відносний розмір найбільшої компоненти</a:t>
+                </a:r>
+              </a:p>
+              <a:p>
+                <a:endParaRPr lang="uk-UA" sz="1200" dirty="0"/>
+              </a:p>
+              <a:p>
+                <a:pPr marL="0" indent="0">
+                  <a:buNone/>
+                </a:pPr>
+                <a14:m>
+                  <m:oMathPara xmlns:m="http://schemas.openxmlformats.org/officeDocument/2006/math">
+                    <m:oMathParaPr>
+                      <m:jc m:val="centerGroup"/>
+                    </m:oMathParaPr>
+                    <m:oMath xmlns:m="http://schemas.openxmlformats.org/officeDocument/2006/math">
+                      <m:r>
+                        <a:rPr lang="uk-UA" sz="1200" i="1">
+                          <a:latin typeface="Cambria Math"/>
+                        </a:rPr>
+                        <m:t>𝐿</m:t>
+                      </m:r>
+                      <m:r>
+                        <a:rPr lang="uk-UA" sz="1200" i="1">
+                          <a:latin typeface="Cambria Math"/>
+                        </a:rPr>
+                        <m:t>=</m:t>
+                      </m:r>
+                      <m:f>
+                        <m:fPr>
+                          <m:ctrlPr>
+                            <a:rPr lang="ru-RU" sz="1200" i="1">
+                              <a:latin typeface="Cambria Math"/>
+                            </a:rPr>
+                          </m:ctrlPr>
+                        </m:fPr>
+                        <m:num>
+                          <m:sSub>
+                            <m:sSubPr>
+                              <m:ctrlPr>
+                                <a:rPr lang="ru-RU" sz="1200" i="1">
+                                  <a:latin typeface="Cambria Math"/>
+                                </a:rPr>
+                              </m:ctrlPr>
+                            </m:sSubPr>
+                            <m:e>
+                              <m:r>
+                                <a:rPr lang="uk-UA" sz="1200" i="1">
+                                  <a:latin typeface="Cambria Math"/>
+                                </a:rPr>
+                                <m:t>𝑁</m:t>
+                              </m:r>
+                            </m:e>
+                            <m:sub>
+                              <m:r>
+                                <a:rPr lang="uk-UA" sz="1200" i="1">
+                                  <a:latin typeface="Cambria Math"/>
+                                </a:rPr>
+                                <m:t>𝑙𝑎𝑟𝑔𝑒𝑠𝑡</m:t>
+                              </m:r>
+                            </m:sub>
+                          </m:sSub>
+                        </m:num>
+                        <m:den>
+                          <m:sSub>
+                            <m:sSubPr>
+                              <m:ctrlPr>
+                                <a:rPr lang="ru-RU" sz="1200" i="1">
+                                  <a:latin typeface="Cambria Math"/>
+                                </a:rPr>
+                              </m:ctrlPr>
+                            </m:sSubPr>
+                            <m:e>
+                              <m:r>
+                                <a:rPr lang="uk-UA" sz="1200" i="1">
+                                  <a:latin typeface="Cambria Math"/>
+                                </a:rPr>
+                                <m:t>𝑁</m:t>
+                              </m:r>
+                            </m:e>
+                            <m:sub>
+                              <m:r>
+                                <a:rPr lang="uk-UA" sz="1200" i="1">
+                                  <a:latin typeface="Cambria Math"/>
+                                </a:rPr>
+                                <m:t>𝑓𝑙𝑜𝑜𝑟</m:t>
+                              </m:r>
+                            </m:sub>
+                          </m:sSub>
+                        </m:den>
+                      </m:f>
+                    </m:oMath>
+                  </m:oMathPara>
+                </a14:m>
+                <a:endParaRPr lang="ru-RU" sz="1200" dirty="0"/>
+              </a:p>
+            </p:txBody>
+          </p:sp>
+        </mc:Choice>
+        <mc:Fallback xmlns="">
+          <p:sp>
+            <p:nvSpPr>
+              <p:cNvPr id="12" name="Google Shape;73;p14"/>
+              <p:cNvSpPr txBox="1">
+                <a:spLocks noRot="1" noChangeAspect="1" noMove="1" noResize="1" noEditPoints="1" noAdjustHandles="1" noChangeArrowheads="1" noChangeShapeType="1" noTextEdit="1"/>
+              </p:cNvSpPr>
+              <p:nvPr/>
+            </p:nvSpPr>
+            <p:spPr>
+              <a:xfrm>
+                <a:off x="3573750" y="1282044"/>
+                <a:ext cx="3456103" cy="1804867"/>
+              </a:xfrm>
+              <a:prstGeom prst="rect">
+                <a:avLst/>
+              </a:prstGeom>
+              <a:blipFill rotWithShape="1">
+                <a:blip r:embed="rId5"/>
+                <a:stretch>
+                  <a:fillRect t="-1014"/>
+                </a:stretch>
+              </a:blipFill>
+              <a:ln>
+                <a:noFill/>
+              </a:ln>
+            </p:spPr>
+            <p:txBody>
+              <a:bodyPr/>
+              <a:lstStyle/>
+              <a:p>
+                <a:r>
+                  <a:rPr lang="ru-RU">
+                    <a:noFill/>
+                  </a:rPr>
+                  <a:t> </a:t>
+                </a:r>
+              </a:p>
+            </p:txBody>
+          </p:sp>
+        </mc:Fallback>
+      </mc:AlternateContent>
+      <p:sp>
+        <p:nvSpPr>
+          <p:cNvPr id="2" name="Номер слайда 1"/>
+          <p:cNvSpPr>
+            <a:spLocks noGrp="1"/>
+          </p:cNvSpPr>
+          <p:nvPr>
+            <p:ph type="sldNum" idx="12"/>
+          </p:nvPr>
+        </p:nvSpPr>
+        <p:spPr/>
+        <p:txBody>
+          <a:bodyPr/>
+          <a:lstStyle/>
+          <a:p>
+            <a:pPr marL="0" lvl="0" indent="0" algn="r" rtl="0">
+              <a:spcBef>
+                <a:spcPts val="0"/>
+              </a:spcBef>
+              <a:spcAft>
+                <a:spcPts val="0"/>
+              </a:spcAft>
+              <a:buNone/>
+            </a:pPr>
+            <a:fld id="{00000000-1234-1234-1234-123412341234}" type="slidenum">
+              <a:rPr lang="ru" smtClean="0"/>
+              <a:t>10</a:t>
+            </a:fld>
+            <a:endParaRPr lang="ru"/>
+          </a:p>
+        </p:txBody>
+      </p:sp>
+    </p:spTree>
+    <p:extLst>
+      <p:ext uri="{BB962C8B-B14F-4D97-AF65-F5344CB8AC3E}">
+        <p14:creationId xmlns:p14="http://schemas.microsoft.com/office/powerpoint/2010/main" val="2823519388"/>
+      </p:ext>
+    </p:extLst>
+  </p:cSld>
+  <p:clrMapOvr>
+    <a:masterClrMapping/>
+  </p:clrMapOvr>
+  <p:timing>
+    <p:tnLst>
+      <p:par>
+        <p:cTn id="1" dur="indefinite" restart="never" nodeType="tmRoot"/>
+      </p:par>
+    </p:tnLst>
+  </p:timing>
+</p:sld>
+</file>
+
+<file path=ppt/slides/slide11.xml><?xml version="1.0" encoding="utf-8"?>
 <p:sld xmlns:a="http://schemas.openxmlformats.org/drawingml/2006/main" xmlns:r="http://schemas.openxmlformats.org/officeDocument/2006/relationships" xmlns:p="http://schemas.openxmlformats.org/presentationml/2006/main">
   <p:cSld>
     <p:spTree>
@@ -9423,7 +10652,7 @@
             </a:pPr>
             <a:fld id="{00000000-1234-1234-1234-123412341234}" type="slidenum">
               <a:rPr lang="ru" smtClean="0"/>
-              <a:t>10</a:t>
+              <a:t>11</a:t>
             </a:fld>
             <a:endParaRPr lang="ru"/>
           </a:p>
@@ -9439,10 +10668,17 @@
   <p:clrMapOvr>
     <a:masterClrMapping/>
   </p:clrMapOvr>
+  <p:timing>
+    <p:tnLst>
+      <p:par>
+        <p:cTn id="1" dur="indefinite" restart="never" nodeType="tmRoot"/>
+      </p:par>
+    </p:tnLst>
+  </p:timing>
 </p:sld>
 </file>
 
-<file path=ppt/slides/slide11.xml><?xml version="1.0" encoding="utf-8"?>
+<file path=ppt/slides/slide12.xml><?xml version="1.0" encoding="utf-8"?>
 <p:sld xmlns:a="http://schemas.openxmlformats.org/drawingml/2006/main" xmlns:r="http://schemas.openxmlformats.org/officeDocument/2006/relationships" xmlns:p="http://schemas.openxmlformats.org/presentationml/2006/main">
   <p:cSld>
     <p:spTree>
@@ -10034,7 +11270,7 @@
             </a:pPr>
             <a:fld id="{00000000-1234-1234-1234-123412341234}" type="slidenum">
               <a:rPr lang="ru" smtClean="0"/>
-              <a:t>11</a:t>
+              <a:t>12</a:t>
             </a:fld>
             <a:endParaRPr lang="ru"/>
           </a:p>
@@ -10060,7 +11296,7 @@
 </p:sld>
 </file>
 
-<file path=ppt/slides/slide12.xml><?xml version="1.0" encoding="utf-8"?>
+<file path=ppt/slides/slide13.xml><?xml version="1.0" encoding="utf-8"?>
 <p:sld xmlns:a="http://schemas.openxmlformats.org/drawingml/2006/main" xmlns:r="http://schemas.openxmlformats.org/officeDocument/2006/relationships" xmlns:p="http://schemas.openxmlformats.org/presentationml/2006/main">
   <p:cSld>
     <p:spTree>
@@ -10280,7 +11516,7 @@
             </a:pPr>
             <a:fld id="{00000000-1234-1234-1234-123412341234}" type="slidenum">
               <a:rPr lang="ru" smtClean="0"/>
-              <a:t>12</a:t>
+              <a:t>13</a:t>
             </a:fld>
             <a:endParaRPr lang="ru"/>
           </a:p>
@@ -10306,7 +11542,7 @@
 </p:sld>
 </file>
 
-<file path=ppt/slides/slide13.xml><?xml version="1.0" encoding="utf-8"?>
+<file path=ppt/slides/slide14.xml><?xml version="1.0" encoding="utf-8"?>
 <p:sld xmlns:a="http://schemas.openxmlformats.org/drawingml/2006/main" xmlns:r="http://schemas.openxmlformats.org/officeDocument/2006/relationships" xmlns:p="http://schemas.openxmlformats.org/presentationml/2006/main">
   <p:cSld>
     <p:spTree>
@@ -10507,7 +11743,7 @@
             </a:pPr>
             <a:fld id="{00000000-1234-1234-1234-123412341234}" type="slidenum">
               <a:rPr lang="ru" smtClean="0"/>
-              <a:t>13</a:t>
+              <a:t>14</a:t>
             </a:fld>
             <a:endParaRPr lang="ru"/>
           </a:p>
@@ -11430,6 +12666,13 @@
   <p:clrMapOvr>
     <a:masterClrMapping/>
   </p:clrMapOvr>
+  <p:timing>
+    <p:tnLst>
+      <p:par>
+        <p:cTn id="1" dur="indefinite" restart="never" nodeType="tmRoot"/>
+      </p:par>
+    </p:tnLst>
+  </p:timing>
 </p:sld>
 </file>
 
@@ -11484,38 +12727,6 @@
               </a:rPr>
               <a:t>Архітектура</a:t>
             </a:r>
-            <a:r>
-              <a:rPr lang="ru-RU" dirty="0" smtClean="0">
-                <a:solidFill>
-                  <a:srgbClr val="3D85C6"/>
-                </a:solidFill>
-              </a:rPr>
-              <a:t> і </a:t>
-            </a:r>
-            <a:r>
-              <a:rPr lang="ru-RU" dirty="0" err="1" smtClean="0">
-                <a:solidFill>
-                  <a:srgbClr val="3D85C6"/>
-                </a:solidFill>
-              </a:rPr>
-              <a:t>представлення</a:t>
-            </a:r>
-            <a:r>
-              <a:rPr lang="ru-RU" dirty="0" smtClean="0">
-                <a:solidFill>
-                  <a:srgbClr val="3D85C6"/>
-                </a:solidFill>
-              </a:rPr>
-              <a:t> </a:t>
-            </a:r>
-            <a:r>
-              <a:rPr lang="ru-RU" dirty="0" err="1" smtClean="0">
-                <a:solidFill>
-                  <a:srgbClr val="3D85C6"/>
-                </a:solidFill>
-              </a:rPr>
-              <a:t>рівня</a:t>
-            </a:r>
             <a:endParaRPr lang="ru-RU" dirty="0">
               <a:solidFill>
                 <a:srgbClr val="3D85C6"/>
@@ -11547,7 +12758,7 @@
         </p:blipFill>
         <p:spPr bwMode="auto">
           <a:xfrm>
-            <a:off x="508673" y="1495740"/>
+            <a:off x="2361697" y="1495739"/>
             <a:ext cx="3945636" cy="2934761"/>
           </a:xfrm>
           <a:prstGeom prst="rect">
@@ -11578,9 +12789,209 @@
           </a:extLst>
         </p:spPr>
       </p:pic>
+      <p:sp>
+        <p:nvSpPr>
+          <p:cNvPr id="7" name="Номер слайда 6"/>
+          <p:cNvSpPr>
+            <a:spLocks noGrp="1"/>
+          </p:cNvSpPr>
+          <p:nvPr>
+            <p:ph type="sldNum" idx="12"/>
+          </p:nvPr>
+        </p:nvSpPr>
+        <p:spPr/>
+        <p:txBody>
+          <a:bodyPr/>
+          <a:lstStyle/>
+          <a:p>
+            <a:pPr marL="0" lvl="0" indent="0" algn="r" rtl="0">
+              <a:spcBef>
+                <a:spcPts val="0"/>
+              </a:spcBef>
+              <a:spcAft>
+                <a:spcPts val="0"/>
+              </a:spcAft>
+              <a:buNone/>
+            </a:pPr>
+            <a:fld id="{00000000-1234-1234-1234-123412341234}" type="slidenum">
+              <a:rPr lang="ru" smtClean="0"/>
+              <a:t>5</a:t>
+            </a:fld>
+            <a:endParaRPr lang="ru"/>
+          </a:p>
+        </p:txBody>
+      </p:sp>
+    </p:spTree>
+    <p:extLst>
+      <p:ext uri="{BB962C8B-B14F-4D97-AF65-F5344CB8AC3E}">
+        <p14:creationId xmlns:p14="http://schemas.microsoft.com/office/powerpoint/2010/main" val="29803037"/>
+      </p:ext>
+    </p:extLst>
+  </p:cSld>
+  <p:clrMapOvr>
+    <a:masterClrMapping/>
+  </p:clrMapOvr>
+  <p:timing>
+    <p:tnLst>
+      <p:par>
+        <p:cTn id="1" dur="indefinite" restart="never" nodeType="tmRoot"/>
+      </p:par>
+    </p:tnLst>
+  </p:timing>
+</p:sld>
+</file>
+
+<file path=ppt/slides/slide6.xml><?xml version="1.0" encoding="utf-8"?>
+<p:sld xmlns:a="http://schemas.openxmlformats.org/drawingml/2006/main" xmlns:r="http://schemas.openxmlformats.org/officeDocument/2006/relationships" xmlns:p="http://schemas.openxmlformats.org/presentationml/2006/main">
+  <p:cSld>
+    <p:spTree>
+      <p:nvGrpSpPr>
+        <p:cNvPr id="1" name="Shape 78"/>
+        <p:cNvGrpSpPr/>
+        <p:nvPr/>
+      </p:nvGrpSpPr>
+      <p:grpSpPr>
+        <a:xfrm>
+          <a:off x="0" y="0"/>
+          <a:ext cx="0" cy="0"/>
+          <a:chOff x="0" y="0"/>
+          <a:chExt cx="0" cy="0"/>
+        </a:xfrm>
+      </p:grpSpPr>
+      <p:sp>
+        <p:nvSpPr>
+          <p:cNvPr id="79" name="Google Shape;79;p15"/>
+          <p:cNvSpPr txBox="1">
+            <a:spLocks noGrp="1"/>
+          </p:cNvSpPr>
+          <p:nvPr>
+            <p:ph type="title"/>
+          </p:nvPr>
+        </p:nvSpPr>
+        <p:spPr>
+          <a:xfrm>
+            <a:off x="311700" y="445025"/>
+            <a:ext cx="6371972" cy="707400"/>
+          </a:xfrm>
+          <a:prstGeom prst="rect">
+            <a:avLst/>
+          </a:prstGeom>
+        </p:spPr>
+        <p:txBody>
+          <a:bodyPr spcFirstLastPara="1" wrap="square" lIns="91425" tIns="91425" rIns="91425" bIns="91425" anchor="t" anchorCtr="0">
+            <a:normAutofit fontScale="90000"/>
+          </a:bodyPr>
+          <a:lstStyle/>
+          <a:p>
+            <a:pPr lvl="0"/>
+            <a:r>
+              <a:rPr lang="ru-RU" dirty="0" err="1" smtClean="0">
+                <a:solidFill>
+                  <a:srgbClr val="3D85C6"/>
+                </a:solidFill>
+              </a:rPr>
+              <a:t>Представлення</a:t>
+            </a:r>
+            <a:r>
+              <a:rPr lang="ru-RU" dirty="0" smtClean="0">
+                <a:solidFill>
+                  <a:srgbClr val="3D85C6"/>
+                </a:solidFill>
+              </a:rPr>
+              <a:t> </a:t>
+            </a:r>
+            <a:r>
+              <a:rPr lang="ru-RU" dirty="0" err="1" smtClean="0">
+                <a:solidFill>
+                  <a:srgbClr val="3D85C6"/>
+                </a:solidFill>
+              </a:rPr>
+              <a:t>рівня</a:t>
+            </a:r>
+            <a:endParaRPr lang="ru-RU" dirty="0">
+              <a:solidFill>
+                <a:srgbClr val="3D85C6"/>
+              </a:solidFill>
+            </a:endParaRPr>
+          </a:p>
+        </p:txBody>
+      </p:sp>
+      <p:sp>
+        <p:nvSpPr>
+          <p:cNvPr id="7" name="Номер слайда 6"/>
+          <p:cNvSpPr>
+            <a:spLocks noGrp="1"/>
+          </p:cNvSpPr>
+          <p:nvPr>
+            <p:ph type="sldNum" idx="12"/>
+          </p:nvPr>
+        </p:nvSpPr>
+        <p:spPr/>
+        <p:txBody>
+          <a:bodyPr/>
+          <a:lstStyle/>
+          <a:p>
+            <a:pPr marL="0" lvl="0" indent="0" algn="r" rtl="0">
+              <a:spcBef>
+                <a:spcPts val="0"/>
+              </a:spcBef>
+              <a:spcAft>
+                <a:spcPts val="0"/>
+              </a:spcAft>
+              <a:buNone/>
+            </a:pPr>
+            <a:fld id="{00000000-1234-1234-1234-123412341234}" type="slidenum">
+              <a:rPr lang="ru" smtClean="0"/>
+              <a:t>6</a:t>
+            </a:fld>
+            <a:endParaRPr lang="ru"/>
+          </a:p>
+        </p:txBody>
+      </p:sp>
       <p:pic>
         <p:nvPicPr>
-          <p:cNvPr id="1027" name="Picture 3" descr="C:\Users\admin\Desktop\5805d2f4558ba29113d7f7e9f454546e.png"/>
+          <p:cNvPr id="2" name="Picture 2" descr="C:\Users\admin\Desktop\465e6518e606b4eb70e4d04b2b3ca8c1.png"/>
+          <p:cNvPicPr>
+            <a:picLocks noChangeAspect="1" noChangeArrowheads="1"/>
+          </p:cNvPicPr>
+          <p:nvPr/>
+        </p:nvPicPr>
+        <p:blipFill>
+          <a:blip r:embed="rId3">
+            <a:extLst>
+              <a:ext uri="{28A0092B-C50C-407E-A947-70E740481C1C}">
+                <a14:useLocalDpi xmlns:a14="http://schemas.microsoft.com/office/drawing/2010/main" val="0"/>
+              </a:ext>
+            </a:extLst>
+          </a:blip>
+          <a:srcRect/>
+          <a:stretch>
+            <a:fillRect/>
+          </a:stretch>
+        </p:blipFill>
+        <p:spPr bwMode="auto">
+          <a:xfrm>
+            <a:off x="919480" y="1401209"/>
+            <a:ext cx="3455988" cy="3069631"/>
+          </a:xfrm>
+          <a:prstGeom prst="rect">
+            <a:avLst/>
+          </a:prstGeom>
+          <a:noFill/>
+          <a:extLst>
+            <a:ext uri="{909E8E84-426E-40DD-AFC4-6F175D3DCCD1}">
+              <a14:hiddenFill xmlns:a14="http://schemas.microsoft.com/office/drawing/2010/main">
+                <a:solidFill>
+                  <a:srgbClr val="FFFFFF"/>
+                </a:solidFill>
+              </a14:hiddenFill>
+            </a:ext>
+          </a:extLst>
+        </p:spPr>
+      </p:pic>
+      <p:pic>
+        <p:nvPicPr>
+          <p:cNvPr id="3" name="Picture 3" descr="C:\Users\admin\Desktop\example_valid_tiling.png"/>
           <p:cNvPicPr>
             <a:picLocks noChangeAspect="1" noChangeArrowheads="1"/>
           </p:cNvPicPr>
@@ -11601,8 +13012,8 @@
         </p:blipFill>
         <p:spPr bwMode="auto">
           <a:xfrm>
-            <a:off x="4769670" y="1495739"/>
-            <a:ext cx="3722085" cy="2913321"/>
+            <a:off x="5051884" y="1360906"/>
+            <a:ext cx="3229786" cy="3150235"/>
           </a:xfrm>
           <a:prstGeom prst="rect">
             <a:avLst/>
@@ -11619,52 +13030,27 @@
           </a:extLst>
         </p:spPr>
       </p:pic>
-      <p:sp>
-        <p:nvSpPr>
-          <p:cNvPr id="7" name="Номер слайда 6"/>
-          <p:cNvSpPr>
-            <a:spLocks noGrp="1"/>
-          </p:cNvSpPr>
-          <p:nvPr>
-            <p:ph type="sldNum" idx="12"/>
-          </p:nvPr>
-        </p:nvSpPr>
-        <p:spPr/>
-        <p:txBody>
-          <a:bodyPr/>
-          <a:lstStyle/>
-          <a:p>
-            <a:pPr marL="0" lvl="0" indent="0" algn="r" rtl="0">
-              <a:spcBef>
-                <a:spcPts val="0"/>
-              </a:spcBef>
-              <a:spcAft>
-                <a:spcPts val="0"/>
-              </a:spcAft>
-              <a:buNone/>
-            </a:pPr>
-            <a:fld id="{00000000-1234-1234-1234-123412341234}" type="slidenum">
-              <a:rPr lang="ru" smtClean="0"/>
-              <a:t>5</a:t>
-            </a:fld>
-            <a:endParaRPr lang="ru"/>
-          </a:p>
-        </p:txBody>
-      </p:sp>
     </p:spTree>
     <p:extLst>
       <p:ext uri="{BB962C8B-B14F-4D97-AF65-F5344CB8AC3E}">
-        <p14:creationId xmlns:p14="http://schemas.microsoft.com/office/powerpoint/2010/main" val="29803037"/>
+        <p14:creationId xmlns:p14="http://schemas.microsoft.com/office/powerpoint/2010/main" val="1379348459"/>
       </p:ext>
     </p:extLst>
   </p:cSld>
   <p:clrMapOvr>
     <a:masterClrMapping/>
   </p:clrMapOvr>
+  <p:timing>
+    <p:tnLst>
+      <p:par>
+        <p:cTn id="1" dur="indefinite" restart="never" nodeType="tmRoot"/>
+      </p:par>
+    </p:tnLst>
+  </p:timing>
 </p:sld>
 </file>
 
-<file path=ppt/slides/slide6.xml><?xml version="1.0" encoding="utf-8"?>
+<file path=ppt/slides/slide7.xml><?xml version="1.0" encoding="utf-8"?>
 <p:sld xmlns:a="http://schemas.openxmlformats.org/drawingml/2006/main" xmlns:r="http://schemas.openxmlformats.org/officeDocument/2006/relationships" xmlns:p="http://schemas.openxmlformats.org/presentationml/2006/main">
   <p:cSld>
     <p:spTree>
@@ -11839,7 +13225,7 @@
             </a:pPr>
             <a:fld id="{00000000-1234-1234-1234-123412341234}" type="slidenum">
               <a:rPr lang="ru" smtClean="0"/>
-              <a:t>6</a:t>
+              <a:t>7</a:t>
             </a:fld>
             <a:endParaRPr lang="ru"/>
           </a:p>
@@ -11963,10 +13349,17 @@
   <p:clrMapOvr>
     <a:masterClrMapping/>
   </p:clrMapOvr>
+  <p:timing>
+    <p:tnLst>
+      <p:par>
+        <p:cTn id="1" dur="indefinite" restart="never" nodeType="tmRoot"/>
+      </p:par>
+    </p:tnLst>
+  </p:timing>
 </p:sld>
 </file>
 
-<file path=ppt/slides/slide7.xml><?xml version="1.0" encoding="utf-8"?>
+<file path=ppt/slides/slide8.xml><?xml version="1.0" encoding="utf-8"?>
 <p:sld xmlns:a="http://schemas.openxmlformats.org/drawingml/2006/main" xmlns:r="http://schemas.openxmlformats.org/officeDocument/2006/relationships" xmlns:p="http://schemas.openxmlformats.org/presentationml/2006/main">
   <p:cSld>
     <p:spTree>
@@ -12135,7 +13528,7 @@
             </a:pPr>
             <a:fld id="{00000000-1234-1234-1234-123412341234}" type="slidenum">
               <a:rPr lang="ru" smtClean="0"/>
-              <a:t>7</a:t>
+              <a:t>8</a:t>
             </a:fld>
             <a:endParaRPr lang="ru"/>
           </a:p>
@@ -12259,10 +13652,17 @@
   <p:clrMapOvr>
     <a:masterClrMapping/>
   </p:clrMapOvr>
+  <p:timing>
+    <p:tnLst>
+      <p:par>
+        <p:cTn id="1" dur="indefinite" restart="never" nodeType="tmRoot"/>
+      </p:par>
+    </p:tnLst>
+  </p:timing>
 </p:sld>
 </file>
 
-<file path=ppt/slides/slide8.xml><?xml version="1.0" encoding="utf-8"?>
+<file path=ppt/slides/slide9.xml><?xml version="1.0" encoding="utf-8"?>
 <p:sld xmlns:a="http://schemas.openxmlformats.org/drawingml/2006/main" xmlns:r="http://schemas.openxmlformats.org/officeDocument/2006/relationships" xmlns:p="http://schemas.openxmlformats.org/presentationml/2006/main">
   <p:cSld>
     <p:spTree>
@@ -12810,7 +14210,7 @@
             </a:pPr>
             <a:fld id="{00000000-1234-1234-1234-123412341234}" type="slidenum">
               <a:rPr lang="ru" smtClean="0"/>
-              <a:t>8</a:t>
+              <a:t>9</a:t>
             </a:fld>
             <a:endParaRPr lang="ru"/>
           </a:p>
@@ -12820,1130 +14220,6 @@
     <p:extLst>
       <p:ext uri="{BB962C8B-B14F-4D97-AF65-F5344CB8AC3E}">
         <p14:creationId xmlns:p14="http://schemas.microsoft.com/office/powerpoint/2010/main" val="3618368140"/>
-      </p:ext>
-    </p:extLst>
-  </p:cSld>
-  <p:clrMapOvr>
-    <a:masterClrMapping/>
-  </p:clrMapOvr>
-  <p:timing>
-    <p:tnLst>
-      <p:par>
-        <p:cTn id="1" dur="indefinite" restart="never" nodeType="tmRoot"/>
-      </p:par>
-    </p:tnLst>
-  </p:timing>
-</p:sld>
-</file>
-
-<file path=ppt/slides/slide9.xml><?xml version="1.0" encoding="utf-8"?>
-<p:sld xmlns:a="http://schemas.openxmlformats.org/drawingml/2006/main" xmlns:r="http://schemas.openxmlformats.org/officeDocument/2006/relationships" xmlns:p="http://schemas.openxmlformats.org/presentationml/2006/main">
-  <p:cSld>
-    <p:spTree>
-      <p:nvGrpSpPr>
-        <p:cNvPr id="1" name="Shape 78"/>
-        <p:cNvGrpSpPr/>
-        <p:nvPr/>
-      </p:nvGrpSpPr>
-      <p:grpSpPr>
-        <a:xfrm>
-          <a:off x="0" y="0"/>
-          <a:ext cx="0" cy="0"/>
-          <a:chOff x="0" y="0"/>
-          <a:chExt cx="0" cy="0"/>
-        </a:xfrm>
-      </p:grpSpPr>
-      <p:sp>
-        <p:nvSpPr>
-          <p:cNvPr id="79" name="Google Shape;79;p15"/>
-          <p:cNvSpPr txBox="1">
-            <a:spLocks noGrp="1"/>
-          </p:cNvSpPr>
-          <p:nvPr>
-            <p:ph type="title"/>
-          </p:nvPr>
-        </p:nvSpPr>
-        <p:spPr>
-          <a:xfrm>
-            <a:off x="311700" y="445025"/>
-            <a:ext cx="3999908" cy="707400"/>
-          </a:xfrm>
-          <a:prstGeom prst="rect">
-            <a:avLst/>
-          </a:prstGeom>
-        </p:spPr>
-        <p:txBody>
-          <a:bodyPr spcFirstLastPara="1" wrap="square" lIns="91425" tIns="91425" rIns="91425" bIns="91425" anchor="t" anchorCtr="0">
-            <a:normAutofit fontScale="90000"/>
-          </a:bodyPr>
-          <a:lstStyle/>
-          <a:p>
-            <a:pPr lvl="0"/>
-            <a:r>
-              <a:rPr lang="ru-RU" dirty="0">
-                <a:solidFill>
-                  <a:srgbClr val="3D85C6"/>
-                </a:solidFill>
-              </a:rPr>
-              <a:t>Метрики</a:t>
-            </a:r>
-          </a:p>
-        </p:txBody>
-      </p:sp>
-      <mc:AlternateContent xmlns:mc="http://schemas.openxmlformats.org/markup-compatibility/2006" xmlns:a14="http://schemas.microsoft.com/office/drawing/2010/main">
-        <mc:Choice Requires="a14">
-          <p:sp>
-            <p:nvSpPr>
-              <p:cNvPr id="10" name="Google Shape;73;p14"/>
-              <p:cNvSpPr txBox="1">
-                <a:spLocks noGrp="1"/>
-              </p:cNvSpPr>
-              <p:nvPr>
-                <p:ph type="body" idx="1"/>
-              </p:nvPr>
-            </p:nvSpPr>
-            <p:spPr>
-              <a:xfrm>
-                <a:off x="402534" y="1353381"/>
-                <a:ext cx="3456103" cy="1273087"/>
-              </a:xfrm>
-              <a:prstGeom prst="rect">
-                <a:avLst/>
-              </a:prstGeom>
-            </p:spPr>
-            <p:txBody>
-              <a:bodyPr spcFirstLastPara="1" wrap="square" lIns="91425" tIns="91425" rIns="91425" bIns="91425" anchor="t" anchorCtr="0">
-                <a:noAutofit/>
-              </a:bodyPr>
-              <a:lstStyle/>
-              <a:p>
-                <a:r>
-                  <a:rPr lang="uk-UA" sz="1200" dirty="0"/>
-                  <a:t>Коефіцієнт прохідності</a:t>
-                </a:r>
-              </a:p>
-              <a:p>
-                <a:endParaRPr lang="uk-UA" sz="1200" dirty="0"/>
-              </a:p>
-              <a:p>
-                <a:pPr marL="0" indent="0">
-                  <a:buNone/>
-                </a:pPr>
-                <a14:m>
-                  <m:oMathPara xmlns:m="http://schemas.openxmlformats.org/officeDocument/2006/math">
-                    <m:oMathParaPr>
-                      <m:jc m:val="centerGroup"/>
-                    </m:oMathParaPr>
-                    <m:oMath xmlns:m="http://schemas.openxmlformats.org/officeDocument/2006/math">
-                      <m:r>
-                        <a:rPr lang="uk-UA" sz="1200" i="1">
-                          <a:latin typeface="Cambria Math"/>
-                        </a:rPr>
-                        <m:t>𝑊</m:t>
-                      </m:r>
-                      <m:r>
-                        <a:rPr lang="uk-UA" sz="1200" i="1">
-                          <a:latin typeface="Cambria Math"/>
-                        </a:rPr>
-                        <m:t>=</m:t>
-                      </m:r>
-                      <m:f>
-                        <m:fPr>
-                          <m:ctrlPr>
-                            <a:rPr lang="ru-RU" sz="1200" i="1">
-                              <a:latin typeface="Cambria Math"/>
-                            </a:rPr>
-                          </m:ctrlPr>
-                        </m:fPr>
-                        <m:num>
-                          <m:sSub>
-                            <m:sSubPr>
-                              <m:ctrlPr>
-                                <a:rPr lang="ru-RU" sz="1200" i="1">
-                                  <a:latin typeface="Cambria Math"/>
-                                </a:rPr>
-                              </m:ctrlPr>
-                            </m:sSubPr>
-                            <m:e>
-                              <m:r>
-                                <a:rPr lang="uk-UA" sz="1200" i="1">
-                                  <a:latin typeface="Cambria Math"/>
-                                </a:rPr>
-                                <m:t>𝑁</m:t>
-                              </m:r>
-                            </m:e>
-                            <m:sub>
-                              <m:r>
-                                <a:rPr lang="uk-UA" sz="1200" i="1">
-                                  <a:latin typeface="Cambria Math"/>
-                                </a:rPr>
-                                <m:t>𝑓𝑙𝑜𝑜𝑟</m:t>
-                              </m:r>
-                            </m:sub>
-                          </m:sSub>
-                        </m:num>
-                        <m:den>
-                          <m:sSub>
-                            <m:sSubPr>
-                              <m:ctrlPr>
-                                <a:rPr lang="ru-RU" sz="1200" i="1">
-                                  <a:latin typeface="Cambria Math"/>
-                                </a:rPr>
-                              </m:ctrlPr>
-                            </m:sSubPr>
-                            <m:e>
-                              <m:r>
-                                <a:rPr lang="uk-UA" sz="1200" i="1">
-                                  <a:latin typeface="Cambria Math"/>
-                                </a:rPr>
-                                <m:t>𝑁</m:t>
-                              </m:r>
-                            </m:e>
-                            <m:sub>
-                              <m:r>
-                                <a:rPr lang="uk-UA" sz="1200" i="1">
-                                  <a:latin typeface="Cambria Math"/>
-                                </a:rPr>
-                                <m:t>𝑡𝑜𝑡𝑎𝑙</m:t>
-                              </m:r>
-                            </m:sub>
-                          </m:sSub>
-                        </m:den>
-                      </m:f>
-                    </m:oMath>
-                  </m:oMathPara>
-                </a14:m>
-                <a:endParaRPr lang="uk-UA" sz="1200" dirty="0"/>
-              </a:p>
-            </p:txBody>
-          </p:sp>
-        </mc:Choice>
-        <mc:Fallback xmlns="">
-          <p:sp>
-            <p:nvSpPr>
-              <p:cNvPr id="10" name="Google Shape;73;p14"/>
-              <p:cNvSpPr txBox="1">
-                <a:spLocks noGrp="1" noRot="1" noChangeAspect="1" noMove="1" noResize="1" noEditPoints="1" noAdjustHandles="1" noChangeArrowheads="1" noChangeShapeType="1" noTextEdit="1"/>
-              </p:cNvSpPr>
-              <p:nvPr>
-                <p:ph type="body" idx="1"/>
-              </p:nvPr>
-            </p:nvSpPr>
-            <p:spPr>
-              <a:xfrm>
-                <a:off x="402534" y="1353381"/>
-                <a:ext cx="3456103" cy="1273087"/>
-              </a:xfrm>
-              <a:prstGeom prst="rect">
-                <a:avLst/>
-              </a:prstGeom>
-              <a:blipFill rotWithShape="1">
-                <a:blip r:embed="rId3"/>
-                <a:stretch>
-                  <a:fillRect t="-1435"/>
-                </a:stretch>
-              </a:blipFill>
-            </p:spPr>
-            <p:txBody>
-              <a:bodyPr/>
-              <a:lstStyle/>
-              <a:p>
-                <a:r>
-                  <a:rPr lang="ru-RU">
-                    <a:noFill/>
-                  </a:rPr>
-                  <a:t> </a:t>
-                </a:r>
-              </a:p>
-            </p:txBody>
-          </p:sp>
-        </mc:Fallback>
-      </mc:AlternateContent>
-      <mc:AlternateContent xmlns:mc="http://schemas.openxmlformats.org/markup-compatibility/2006" xmlns:a14="http://schemas.microsoft.com/office/drawing/2010/main">
-        <mc:Choice Requires="a14">
-          <p:sp>
-            <p:nvSpPr>
-              <p:cNvPr id="11" name="Google Shape;73;p14"/>
-              <p:cNvSpPr txBox="1">
-                <a:spLocks/>
-              </p:cNvSpPr>
-              <p:nvPr/>
-            </p:nvSpPr>
-            <p:spPr>
-              <a:xfrm>
-                <a:off x="477112" y="2951959"/>
-                <a:ext cx="3456103" cy="1273087"/>
-              </a:xfrm>
-              <a:prstGeom prst="rect">
-                <a:avLst/>
-              </a:prstGeom>
-              <a:noFill/>
-              <a:ln>
-                <a:noFill/>
-              </a:ln>
-            </p:spPr>
-            <p:txBody>
-              <a:bodyPr spcFirstLastPara="1" wrap="square" lIns="91425" tIns="91425" rIns="91425" bIns="91425" anchor="t" anchorCtr="0">
-                <a:noAutofit/>
-              </a:bodyPr>
-              <a:lstStyle>
-                <a:defPPr marR="0" lvl="0" algn="l" rtl="0">
-                  <a:lnSpc>
-                    <a:spcPct val="100000"/>
-                  </a:lnSpc>
-                  <a:spcBef>
-                    <a:spcPts val="0"/>
-                  </a:spcBef>
-                  <a:spcAft>
-                    <a:spcPts val="0"/>
-                  </a:spcAft>
-                </a:defPPr>
-                <a:lvl1pPr marL="457200" marR="0" lvl="0" indent="-342900" algn="l" rtl="0">
-                  <a:lnSpc>
-                    <a:spcPct val="115000"/>
-                  </a:lnSpc>
-                  <a:spcBef>
-                    <a:spcPts val="0"/>
-                  </a:spcBef>
-                  <a:spcAft>
-                    <a:spcPts val="0"/>
-                  </a:spcAft>
-                  <a:buClr>
-                    <a:schemeClr val="dk2"/>
-                  </a:buClr>
-                  <a:buSzPts val="1800"/>
-                  <a:buFont typeface="Open Sans"/>
-                  <a:buChar char="●"/>
-                  <a:defRPr sz="1800" b="0" i="0" u="none" strike="noStrike" cap="none">
-                    <a:solidFill>
-                      <a:schemeClr val="dk2"/>
-                    </a:solidFill>
-                    <a:latin typeface="Open Sans"/>
-                    <a:ea typeface="Open Sans"/>
-                    <a:cs typeface="Open Sans"/>
-                    <a:sym typeface="Open Sans"/>
-                  </a:defRPr>
-                </a:lvl1pPr>
-                <a:lvl2pPr marL="914400" marR="0" lvl="1" indent="-317500" algn="l" rtl="0">
-                  <a:lnSpc>
-                    <a:spcPct val="115000"/>
-                  </a:lnSpc>
-                  <a:spcBef>
-                    <a:spcPts val="0"/>
-                  </a:spcBef>
-                  <a:spcAft>
-                    <a:spcPts val="0"/>
-                  </a:spcAft>
-                  <a:buClr>
-                    <a:schemeClr val="dk2"/>
-                  </a:buClr>
-                  <a:buSzPts val="1400"/>
-                  <a:buFont typeface="Open Sans"/>
-                  <a:buChar char="○"/>
-                  <a:defRPr sz="1400" b="0" i="0" u="none" strike="noStrike" cap="none">
-                    <a:solidFill>
-                      <a:schemeClr val="dk2"/>
-                    </a:solidFill>
-                    <a:latin typeface="Open Sans"/>
-                    <a:ea typeface="Open Sans"/>
-                    <a:cs typeface="Open Sans"/>
-                    <a:sym typeface="Open Sans"/>
-                  </a:defRPr>
-                </a:lvl2pPr>
-                <a:lvl3pPr marL="1371600" marR="0" lvl="2" indent="-317500" algn="l" rtl="0">
-                  <a:lnSpc>
-                    <a:spcPct val="115000"/>
-                  </a:lnSpc>
-                  <a:spcBef>
-                    <a:spcPts val="0"/>
-                  </a:spcBef>
-                  <a:spcAft>
-                    <a:spcPts val="0"/>
-                  </a:spcAft>
-                  <a:buClr>
-                    <a:schemeClr val="dk2"/>
-                  </a:buClr>
-                  <a:buSzPts val="1400"/>
-                  <a:buFont typeface="Open Sans"/>
-                  <a:buChar char="■"/>
-                  <a:defRPr sz="1400" b="0" i="0" u="none" strike="noStrike" cap="none">
-                    <a:solidFill>
-                      <a:schemeClr val="dk2"/>
-                    </a:solidFill>
-                    <a:latin typeface="Open Sans"/>
-                    <a:ea typeface="Open Sans"/>
-                    <a:cs typeface="Open Sans"/>
-                    <a:sym typeface="Open Sans"/>
-                  </a:defRPr>
-                </a:lvl3pPr>
-                <a:lvl4pPr marL="1828800" marR="0" lvl="3" indent="-317500" algn="l" rtl="0">
-                  <a:lnSpc>
-                    <a:spcPct val="115000"/>
-                  </a:lnSpc>
-                  <a:spcBef>
-                    <a:spcPts val="0"/>
-                  </a:spcBef>
-                  <a:spcAft>
-                    <a:spcPts val="0"/>
-                  </a:spcAft>
-                  <a:buClr>
-                    <a:schemeClr val="dk2"/>
-                  </a:buClr>
-                  <a:buSzPts val="1400"/>
-                  <a:buFont typeface="Open Sans"/>
-                  <a:buChar char="●"/>
-                  <a:defRPr sz="1400" b="0" i="0" u="none" strike="noStrike" cap="none">
-                    <a:solidFill>
-                      <a:schemeClr val="dk2"/>
-                    </a:solidFill>
-                    <a:latin typeface="Open Sans"/>
-                    <a:ea typeface="Open Sans"/>
-                    <a:cs typeface="Open Sans"/>
-                    <a:sym typeface="Open Sans"/>
-                  </a:defRPr>
-                </a:lvl4pPr>
-                <a:lvl5pPr marL="2286000" marR="0" lvl="4" indent="-317500" algn="l" rtl="0">
-                  <a:lnSpc>
-                    <a:spcPct val="115000"/>
-                  </a:lnSpc>
-                  <a:spcBef>
-                    <a:spcPts val="0"/>
-                  </a:spcBef>
-                  <a:spcAft>
-                    <a:spcPts val="0"/>
-                  </a:spcAft>
-                  <a:buClr>
-                    <a:schemeClr val="dk2"/>
-                  </a:buClr>
-                  <a:buSzPts val="1400"/>
-                  <a:buFont typeface="Open Sans"/>
-                  <a:buChar char="○"/>
-                  <a:defRPr sz="1400" b="0" i="0" u="none" strike="noStrike" cap="none">
-                    <a:solidFill>
-                      <a:schemeClr val="dk2"/>
-                    </a:solidFill>
-                    <a:latin typeface="Open Sans"/>
-                    <a:ea typeface="Open Sans"/>
-                    <a:cs typeface="Open Sans"/>
-                    <a:sym typeface="Open Sans"/>
-                  </a:defRPr>
-                </a:lvl5pPr>
-                <a:lvl6pPr marL="2743200" marR="0" lvl="5" indent="-317500" algn="l" rtl="0">
-                  <a:lnSpc>
-                    <a:spcPct val="115000"/>
-                  </a:lnSpc>
-                  <a:spcBef>
-                    <a:spcPts val="0"/>
-                  </a:spcBef>
-                  <a:spcAft>
-                    <a:spcPts val="0"/>
-                  </a:spcAft>
-                  <a:buClr>
-                    <a:schemeClr val="dk2"/>
-                  </a:buClr>
-                  <a:buSzPts val="1400"/>
-                  <a:buFont typeface="Open Sans"/>
-                  <a:buChar char="■"/>
-                  <a:defRPr sz="1400" b="0" i="0" u="none" strike="noStrike" cap="none">
-                    <a:solidFill>
-                      <a:schemeClr val="dk2"/>
-                    </a:solidFill>
-                    <a:latin typeface="Open Sans"/>
-                    <a:ea typeface="Open Sans"/>
-                    <a:cs typeface="Open Sans"/>
-                    <a:sym typeface="Open Sans"/>
-                  </a:defRPr>
-                </a:lvl6pPr>
-                <a:lvl7pPr marL="3200400" marR="0" lvl="6" indent="-317500" algn="l" rtl="0">
-                  <a:lnSpc>
-                    <a:spcPct val="115000"/>
-                  </a:lnSpc>
-                  <a:spcBef>
-                    <a:spcPts val="0"/>
-                  </a:spcBef>
-                  <a:spcAft>
-                    <a:spcPts val="0"/>
-                  </a:spcAft>
-                  <a:buClr>
-                    <a:schemeClr val="dk2"/>
-                  </a:buClr>
-                  <a:buSzPts val="1400"/>
-                  <a:buFont typeface="Open Sans"/>
-                  <a:buChar char="●"/>
-                  <a:defRPr sz="1400" b="0" i="0" u="none" strike="noStrike" cap="none">
-                    <a:solidFill>
-                      <a:schemeClr val="dk2"/>
-                    </a:solidFill>
-                    <a:latin typeface="Open Sans"/>
-                    <a:ea typeface="Open Sans"/>
-                    <a:cs typeface="Open Sans"/>
-                    <a:sym typeface="Open Sans"/>
-                  </a:defRPr>
-                </a:lvl7pPr>
-                <a:lvl8pPr marL="3657600" marR="0" lvl="7" indent="-317500" algn="l" rtl="0">
-                  <a:lnSpc>
-                    <a:spcPct val="115000"/>
-                  </a:lnSpc>
-                  <a:spcBef>
-                    <a:spcPts val="0"/>
-                  </a:spcBef>
-                  <a:spcAft>
-                    <a:spcPts val="0"/>
-                  </a:spcAft>
-                  <a:buClr>
-                    <a:schemeClr val="dk2"/>
-                  </a:buClr>
-                  <a:buSzPts val="1400"/>
-                  <a:buFont typeface="Open Sans"/>
-                  <a:buChar char="○"/>
-                  <a:defRPr sz="1400" b="0" i="0" u="none" strike="noStrike" cap="none">
-                    <a:solidFill>
-                      <a:schemeClr val="dk2"/>
-                    </a:solidFill>
-                    <a:latin typeface="Open Sans"/>
-                    <a:ea typeface="Open Sans"/>
-                    <a:cs typeface="Open Sans"/>
-                    <a:sym typeface="Open Sans"/>
-                  </a:defRPr>
-                </a:lvl8pPr>
-                <a:lvl9pPr marL="4114800" marR="0" lvl="8" indent="-317500" algn="l" rtl="0">
-                  <a:lnSpc>
-                    <a:spcPct val="115000"/>
-                  </a:lnSpc>
-                  <a:spcBef>
-                    <a:spcPts val="0"/>
-                  </a:spcBef>
-                  <a:spcAft>
-                    <a:spcPts val="0"/>
-                  </a:spcAft>
-                  <a:buClr>
-                    <a:schemeClr val="dk2"/>
-                  </a:buClr>
-                  <a:buSzPts val="1400"/>
-                  <a:buFont typeface="Open Sans"/>
-                  <a:buChar char="■"/>
-                  <a:defRPr sz="1400" b="0" i="0" u="none" strike="noStrike" cap="none">
-                    <a:solidFill>
-                      <a:schemeClr val="dk2"/>
-                    </a:solidFill>
-                    <a:latin typeface="Open Sans"/>
-                    <a:ea typeface="Open Sans"/>
-                    <a:cs typeface="Open Sans"/>
-                    <a:sym typeface="Open Sans"/>
-                  </a:defRPr>
-                </a:lvl9pPr>
-              </a:lstStyle>
-              <a:p>
-                <a:r>
-                  <a:rPr lang="uk-UA" sz="1200" dirty="0"/>
-                  <a:t>Прямолінійність меж</a:t>
-                </a:r>
-              </a:p>
-              <a:p>
-                <a:endParaRPr lang="uk-UA" sz="1200" dirty="0"/>
-              </a:p>
-              <a:p>
-                <a:pPr marL="0" indent="0">
-                  <a:buNone/>
-                </a:pPr>
-                <a14:m>
-                  <m:oMathPara xmlns:m="http://schemas.openxmlformats.org/officeDocument/2006/math">
-                    <m:oMathParaPr>
-                      <m:jc m:val="centerGroup"/>
-                    </m:oMathParaPr>
-                    <m:oMath xmlns:m="http://schemas.openxmlformats.org/officeDocument/2006/math">
-                      <m:r>
-                        <a:rPr lang="uk-UA" sz="1200" i="1">
-                          <a:latin typeface="Cambria Math"/>
-                        </a:rPr>
-                        <m:t>𝑆</m:t>
-                      </m:r>
-                      <m:r>
-                        <a:rPr lang="uk-UA" sz="1200" i="1">
-                          <a:latin typeface="Cambria Math"/>
-                        </a:rPr>
-                        <m:t>=</m:t>
-                      </m:r>
-                      <m:f>
-                        <m:fPr>
-                          <m:ctrlPr>
-                            <a:rPr lang="ru-RU" sz="1200" i="1">
-                              <a:latin typeface="Cambria Math"/>
-                            </a:rPr>
-                          </m:ctrlPr>
-                        </m:fPr>
-                        <m:num>
-                          <m:sSub>
-                            <m:sSubPr>
-                              <m:ctrlPr>
-                                <a:rPr lang="ru-RU" sz="1200" i="1">
-                                  <a:latin typeface="Cambria Math"/>
-                                </a:rPr>
-                              </m:ctrlPr>
-                            </m:sSubPr>
-                            <m:e>
-                              <m:r>
-                                <a:rPr lang="uk-UA" sz="1200" i="1">
-                                  <a:latin typeface="Cambria Math"/>
-                                </a:rPr>
-                                <m:t>𝐿</m:t>
-                              </m:r>
-                            </m:e>
-                            <m:sub>
-                              <m:r>
-                                <a:rPr lang="uk-UA" sz="1200" i="1">
-                                  <a:latin typeface="Cambria Math"/>
-                                </a:rPr>
-                                <m:t>𝑠𝑡𝑟𝑎𝑖𝑔h𝑡</m:t>
-                              </m:r>
-                            </m:sub>
-                          </m:sSub>
-                        </m:num>
-                        <m:den>
-                          <m:sSub>
-                            <m:sSubPr>
-                              <m:ctrlPr>
-                                <a:rPr lang="ru-RU" sz="1200" i="1">
-                                  <a:latin typeface="Cambria Math"/>
-                                </a:rPr>
-                              </m:ctrlPr>
-                            </m:sSubPr>
-                            <m:e>
-                              <m:r>
-                                <a:rPr lang="uk-UA" sz="1200" i="1">
-                                  <a:latin typeface="Cambria Math"/>
-                                </a:rPr>
-                                <m:t>𝑁</m:t>
-                              </m:r>
-                            </m:e>
-                            <m:sub>
-                              <m:r>
-                                <a:rPr lang="uk-UA" sz="1200" i="1">
-                                  <a:latin typeface="Cambria Math"/>
-                                </a:rPr>
-                                <m:t>𝑐𝑜𝑛𝑡𝑜𝑢𝑟</m:t>
-                              </m:r>
-                            </m:sub>
-                          </m:sSub>
-                        </m:den>
-                      </m:f>
-                    </m:oMath>
-                  </m:oMathPara>
-                </a14:m>
-                <a:endParaRPr lang="ru-RU" sz="1200" dirty="0"/>
-              </a:p>
-            </p:txBody>
-          </p:sp>
-        </mc:Choice>
-        <mc:Fallback xmlns="">
-          <p:sp>
-            <p:nvSpPr>
-              <p:cNvPr id="11" name="Google Shape;73;p14"/>
-              <p:cNvSpPr txBox="1">
-                <a:spLocks noRot="1" noChangeAspect="1" noMove="1" noResize="1" noEditPoints="1" noAdjustHandles="1" noChangeArrowheads="1" noChangeShapeType="1" noTextEdit="1"/>
-              </p:cNvSpPr>
-              <p:nvPr/>
-            </p:nvSpPr>
-            <p:spPr>
-              <a:xfrm>
-                <a:off x="477112" y="2951959"/>
-                <a:ext cx="3456103" cy="1273087"/>
-              </a:xfrm>
-              <a:prstGeom prst="rect">
-                <a:avLst/>
-              </a:prstGeom>
-              <a:blipFill rotWithShape="1">
-                <a:blip r:embed="rId4"/>
-                <a:stretch>
-                  <a:fillRect t="-1435"/>
-                </a:stretch>
-              </a:blipFill>
-              <a:ln>
-                <a:noFill/>
-              </a:ln>
-            </p:spPr>
-            <p:txBody>
-              <a:bodyPr/>
-              <a:lstStyle/>
-              <a:p>
-                <a:r>
-                  <a:rPr lang="ru-RU">
-                    <a:noFill/>
-                  </a:rPr>
-                  <a:t> </a:t>
-                </a:r>
-              </a:p>
-            </p:txBody>
-          </p:sp>
-        </mc:Fallback>
-      </mc:AlternateContent>
-      <mc:AlternateContent xmlns:mc="http://schemas.openxmlformats.org/markup-compatibility/2006" xmlns:a14="http://schemas.microsoft.com/office/drawing/2010/main">
-        <mc:Choice Requires="a14">
-          <p:sp>
-            <p:nvSpPr>
-              <p:cNvPr id="12" name="Google Shape;73;p14"/>
-              <p:cNvSpPr txBox="1">
-                <a:spLocks/>
-              </p:cNvSpPr>
-              <p:nvPr/>
-            </p:nvSpPr>
-            <p:spPr>
-              <a:xfrm>
-                <a:off x="3573750" y="1282044"/>
-                <a:ext cx="3456103" cy="1804867"/>
-              </a:xfrm>
-              <a:prstGeom prst="rect">
-                <a:avLst/>
-              </a:prstGeom>
-              <a:noFill/>
-              <a:ln>
-                <a:noFill/>
-              </a:ln>
-            </p:spPr>
-            <p:txBody>
-              <a:bodyPr spcFirstLastPara="1" wrap="square" lIns="91425" tIns="91425" rIns="91425" bIns="91425" anchor="t" anchorCtr="0">
-                <a:noAutofit/>
-              </a:bodyPr>
-              <a:lstStyle>
-                <a:defPPr marR="0" lvl="0" algn="l" rtl="0">
-                  <a:lnSpc>
-                    <a:spcPct val="100000"/>
-                  </a:lnSpc>
-                  <a:spcBef>
-                    <a:spcPts val="0"/>
-                  </a:spcBef>
-                  <a:spcAft>
-                    <a:spcPts val="0"/>
-                  </a:spcAft>
-                </a:defPPr>
-                <a:lvl1pPr marL="457200" marR="0" lvl="0" indent="-342900" algn="l" rtl="0">
-                  <a:lnSpc>
-                    <a:spcPct val="115000"/>
-                  </a:lnSpc>
-                  <a:spcBef>
-                    <a:spcPts val="0"/>
-                  </a:spcBef>
-                  <a:spcAft>
-                    <a:spcPts val="0"/>
-                  </a:spcAft>
-                  <a:buClr>
-                    <a:schemeClr val="dk2"/>
-                  </a:buClr>
-                  <a:buSzPts val="1800"/>
-                  <a:buFont typeface="Open Sans"/>
-                  <a:buChar char="●"/>
-                  <a:defRPr sz="1800" b="0" i="0" u="none" strike="noStrike" cap="none">
-                    <a:solidFill>
-                      <a:schemeClr val="dk2"/>
-                    </a:solidFill>
-                    <a:latin typeface="Open Sans"/>
-                    <a:ea typeface="Open Sans"/>
-                    <a:cs typeface="Open Sans"/>
-                    <a:sym typeface="Open Sans"/>
-                  </a:defRPr>
-                </a:lvl1pPr>
-                <a:lvl2pPr marL="914400" marR="0" lvl="1" indent="-317500" algn="l" rtl="0">
-                  <a:lnSpc>
-                    <a:spcPct val="115000"/>
-                  </a:lnSpc>
-                  <a:spcBef>
-                    <a:spcPts val="0"/>
-                  </a:spcBef>
-                  <a:spcAft>
-                    <a:spcPts val="0"/>
-                  </a:spcAft>
-                  <a:buClr>
-                    <a:schemeClr val="dk2"/>
-                  </a:buClr>
-                  <a:buSzPts val="1400"/>
-                  <a:buFont typeface="Open Sans"/>
-                  <a:buChar char="○"/>
-                  <a:defRPr sz="1400" b="0" i="0" u="none" strike="noStrike" cap="none">
-                    <a:solidFill>
-                      <a:schemeClr val="dk2"/>
-                    </a:solidFill>
-                    <a:latin typeface="Open Sans"/>
-                    <a:ea typeface="Open Sans"/>
-                    <a:cs typeface="Open Sans"/>
-                    <a:sym typeface="Open Sans"/>
-                  </a:defRPr>
-                </a:lvl2pPr>
-                <a:lvl3pPr marL="1371600" marR="0" lvl="2" indent="-317500" algn="l" rtl="0">
-                  <a:lnSpc>
-                    <a:spcPct val="115000"/>
-                  </a:lnSpc>
-                  <a:spcBef>
-                    <a:spcPts val="0"/>
-                  </a:spcBef>
-                  <a:spcAft>
-                    <a:spcPts val="0"/>
-                  </a:spcAft>
-                  <a:buClr>
-                    <a:schemeClr val="dk2"/>
-                  </a:buClr>
-                  <a:buSzPts val="1400"/>
-                  <a:buFont typeface="Open Sans"/>
-                  <a:buChar char="■"/>
-                  <a:defRPr sz="1400" b="0" i="0" u="none" strike="noStrike" cap="none">
-                    <a:solidFill>
-                      <a:schemeClr val="dk2"/>
-                    </a:solidFill>
-                    <a:latin typeface="Open Sans"/>
-                    <a:ea typeface="Open Sans"/>
-                    <a:cs typeface="Open Sans"/>
-                    <a:sym typeface="Open Sans"/>
-                  </a:defRPr>
-                </a:lvl3pPr>
-                <a:lvl4pPr marL="1828800" marR="0" lvl="3" indent="-317500" algn="l" rtl="0">
-                  <a:lnSpc>
-                    <a:spcPct val="115000"/>
-                  </a:lnSpc>
-                  <a:spcBef>
-                    <a:spcPts val="0"/>
-                  </a:spcBef>
-                  <a:spcAft>
-                    <a:spcPts val="0"/>
-                  </a:spcAft>
-                  <a:buClr>
-                    <a:schemeClr val="dk2"/>
-                  </a:buClr>
-                  <a:buSzPts val="1400"/>
-                  <a:buFont typeface="Open Sans"/>
-                  <a:buChar char="●"/>
-                  <a:defRPr sz="1400" b="0" i="0" u="none" strike="noStrike" cap="none">
-                    <a:solidFill>
-                      <a:schemeClr val="dk2"/>
-                    </a:solidFill>
-                    <a:latin typeface="Open Sans"/>
-                    <a:ea typeface="Open Sans"/>
-                    <a:cs typeface="Open Sans"/>
-                    <a:sym typeface="Open Sans"/>
-                  </a:defRPr>
-                </a:lvl4pPr>
-                <a:lvl5pPr marL="2286000" marR="0" lvl="4" indent="-317500" algn="l" rtl="0">
-                  <a:lnSpc>
-                    <a:spcPct val="115000"/>
-                  </a:lnSpc>
-                  <a:spcBef>
-                    <a:spcPts val="0"/>
-                  </a:spcBef>
-                  <a:spcAft>
-                    <a:spcPts val="0"/>
-                  </a:spcAft>
-                  <a:buClr>
-                    <a:schemeClr val="dk2"/>
-                  </a:buClr>
-                  <a:buSzPts val="1400"/>
-                  <a:buFont typeface="Open Sans"/>
-                  <a:buChar char="○"/>
-                  <a:defRPr sz="1400" b="0" i="0" u="none" strike="noStrike" cap="none">
-                    <a:solidFill>
-                      <a:schemeClr val="dk2"/>
-                    </a:solidFill>
-                    <a:latin typeface="Open Sans"/>
-                    <a:ea typeface="Open Sans"/>
-                    <a:cs typeface="Open Sans"/>
-                    <a:sym typeface="Open Sans"/>
-                  </a:defRPr>
-                </a:lvl5pPr>
-                <a:lvl6pPr marL="2743200" marR="0" lvl="5" indent="-317500" algn="l" rtl="0">
-                  <a:lnSpc>
-                    <a:spcPct val="115000"/>
-                  </a:lnSpc>
-                  <a:spcBef>
-                    <a:spcPts val="0"/>
-                  </a:spcBef>
-                  <a:spcAft>
-                    <a:spcPts val="0"/>
-                  </a:spcAft>
-                  <a:buClr>
-                    <a:schemeClr val="dk2"/>
-                  </a:buClr>
-                  <a:buSzPts val="1400"/>
-                  <a:buFont typeface="Open Sans"/>
-                  <a:buChar char="■"/>
-                  <a:defRPr sz="1400" b="0" i="0" u="none" strike="noStrike" cap="none">
-                    <a:solidFill>
-                      <a:schemeClr val="dk2"/>
-                    </a:solidFill>
-                    <a:latin typeface="Open Sans"/>
-                    <a:ea typeface="Open Sans"/>
-                    <a:cs typeface="Open Sans"/>
-                    <a:sym typeface="Open Sans"/>
-                  </a:defRPr>
-                </a:lvl6pPr>
-                <a:lvl7pPr marL="3200400" marR="0" lvl="6" indent="-317500" algn="l" rtl="0">
-                  <a:lnSpc>
-                    <a:spcPct val="115000"/>
-                  </a:lnSpc>
-                  <a:spcBef>
-                    <a:spcPts val="0"/>
-                  </a:spcBef>
-                  <a:spcAft>
-                    <a:spcPts val="0"/>
-                  </a:spcAft>
-                  <a:buClr>
-                    <a:schemeClr val="dk2"/>
-                  </a:buClr>
-                  <a:buSzPts val="1400"/>
-                  <a:buFont typeface="Open Sans"/>
-                  <a:buChar char="●"/>
-                  <a:defRPr sz="1400" b="0" i="0" u="none" strike="noStrike" cap="none">
-                    <a:solidFill>
-                      <a:schemeClr val="dk2"/>
-                    </a:solidFill>
-                    <a:latin typeface="Open Sans"/>
-                    <a:ea typeface="Open Sans"/>
-                    <a:cs typeface="Open Sans"/>
-                    <a:sym typeface="Open Sans"/>
-                  </a:defRPr>
-                </a:lvl7pPr>
-                <a:lvl8pPr marL="3657600" marR="0" lvl="7" indent="-317500" algn="l" rtl="0">
-                  <a:lnSpc>
-                    <a:spcPct val="115000"/>
-                  </a:lnSpc>
-                  <a:spcBef>
-                    <a:spcPts val="0"/>
-                  </a:spcBef>
-                  <a:spcAft>
-                    <a:spcPts val="0"/>
-                  </a:spcAft>
-                  <a:buClr>
-                    <a:schemeClr val="dk2"/>
-                  </a:buClr>
-                  <a:buSzPts val="1400"/>
-                  <a:buFont typeface="Open Sans"/>
-                  <a:buChar char="○"/>
-                  <a:defRPr sz="1400" b="0" i="0" u="none" strike="noStrike" cap="none">
-                    <a:solidFill>
-                      <a:schemeClr val="dk2"/>
-                    </a:solidFill>
-                    <a:latin typeface="Open Sans"/>
-                    <a:ea typeface="Open Sans"/>
-                    <a:cs typeface="Open Sans"/>
-                    <a:sym typeface="Open Sans"/>
-                  </a:defRPr>
-                </a:lvl8pPr>
-                <a:lvl9pPr marL="4114800" marR="0" lvl="8" indent="-317500" algn="l" rtl="0">
-                  <a:lnSpc>
-                    <a:spcPct val="115000"/>
-                  </a:lnSpc>
-                  <a:spcBef>
-                    <a:spcPts val="0"/>
-                  </a:spcBef>
-                  <a:spcAft>
-                    <a:spcPts val="0"/>
-                  </a:spcAft>
-                  <a:buClr>
-                    <a:schemeClr val="dk2"/>
-                  </a:buClr>
-                  <a:buSzPts val="1400"/>
-                  <a:buFont typeface="Open Sans"/>
-                  <a:buChar char="■"/>
-                  <a:defRPr sz="1400" b="0" i="0" u="none" strike="noStrike" cap="none">
-                    <a:solidFill>
-                      <a:schemeClr val="dk2"/>
-                    </a:solidFill>
-                    <a:latin typeface="Open Sans"/>
-                    <a:ea typeface="Open Sans"/>
-                    <a:cs typeface="Open Sans"/>
-                    <a:sym typeface="Open Sans"/>
-                  </a:defRPr>
-                </a:lvl9pPr>
-              </a:lstStyle>
-              <a:p>
-                <a:r>
-                  <a:rPr lang="uk-UA" sz="1200" dirty="0"/>
-                  <a:t>Кількість компонент </a:t>
-                </a:r>
-                <a:r>
-                  <a:rPr lang="uk-UA" sz="1200" dirty="0" smtClean="0"/>
-                  <a:t>зв’язності</a:t>
-                </a:r>
-              </a:p>
-              <a:p>
-                <a:endParaRPr lang="uk-UA" sz="1200" dirty="0"/>
-              </a:p>
-              <a:p>
-                <a:r>
-                  <a:rPr lang="uk-UA" sz="1200" dirty="0"/>
-                  <a:t>Відносний розмір найбільшої компоненти</a:t>
-                </a:r>
-              </a:p>
-              <a:p>
-                <a:endParaRPr lang="uk-UA" sz="1200" dirty="0"/>
-              </a:p>
-              <a:p>
-                <a:pPr marL="0" indent="0">
-                  <a:buNone/>
-                </a:pPr>
-                <a14:m>
-                  <m:oMathPara xmlns:m="http://schemas.openxmlformats.org/officeDocument/2006/math">
-                    <m:oMathParaPr>
-                      <m:jc m:val="centerGroup"/>
-                    </m:oMathParaPr>
-                    <m:oMath xmlns:m="http://schemas.openxmlformats.org/officeDocument/2006/math">
-                      <m:r>
-                        <a:rPr lang="uk-UA" sz="1200" i="1">
-                          <a:latin typeface="Cambria Math"/>
-                        </a:rPr>
-                        <m:t>𝐿</m:t>
-                      </m:r>
-                      <m:r>
-                        <a:rPr lang="uk-UA" sz="1200" i="1">
-                          <a:latin typeface="Cambria Math"/>
-                        </a:rPr>
-                        <m:t>=</m:t>
-                      </m:r>
-                      <m:f>
-                        <m:fPr>
-                          <m:ctrlPr>
-                            <a:rPr lang="ru-RU" sz="1200" i="1">
-                              <a:latin typeface="Cambria Math"/>
-                            </a:rPr>
-                          </m:ctrlPr>
-                        </m:fPr>
-                        <m:num>
-                          <m:sSub>
-                            <m:sSubPr>
-                              <m:ctrlPr>
-                                <a:rPr lang="ru-RU" sz="1200" i="1">
-                                  <a:latin typeface="Cambria Math"/>
-                                </a:rPr>
-                              </m:ctrlPr>
-                            </m:sSubPr>
-                            <m:e>
-                              <m:r>
-                                <a:rPr lang="uk-UA" sz="1200" i="1">
-                                  <a:latin typeface="Cambria Math"/>
-                                </a:rPr>
-                                <m:t>𝑁</m:t>
-                              </m:r>
-                            </m:e>
-                            <m:sub>
-                              <m:r>
-                                <a:rPr lang="uk-UA" sz="1200" i="1">
-                                  <a:latin typeface="Cambria Math"/>
-                                </a:rPr>
-                                <m:t>𝑙𝑎𝑟𝑔𝑒𝑠𝑡</m:t>
-                              </m:r>
-                            </m:sub>
-                          </m:sSub>
-                        </m:num>
-                        <m:den>
-                          <m:sSub>
-                            <m:sSubPr>
-                              <m:ctrlPr>
-                                <a:rPr lang="ru-RU" sz="1200" i="1">
-                                  <a:latin typeface="Cambria Math"/>
-                                </a:rPr>
-                              </m:ctrlPr>
-                            </m:sSubPr>
-                            <m:e>
-                              <m:r>
-                                <a:rPr lang="uk-UA" sz="1200" i="1">
-                                  <a:latin typeface="Cambria Math"/>
-                                </a:rPr>
-                                <m:t>𝑁</m:t>
-                              </m:r>
-                            </m:e>
-                            <m:sub>
-                              <m:r>
-                                <a:rPr lang="uk-UA" sz="1200" i="1">
-                                  <a:latin typeface="Cambria Math"/>
-                                </a:rPr>
-                                <m:t>𝑓𝑙𝑜𝑜𝑟</m:t>
-                              </m:r>
-                            </m:sub>
-                          </m:sSub>
-                        </m:den>
-                      </m:f>
-                    </m:oMath>
-                  </m:oMathPara>
-                </a14:m>
-                <a:endParaRPr lang="ru-RU" sz="1200" dirty="0"/>
-              </a:p>
-            </p:txBody>
-          </p:sp>
-        </mc:Choice>
-        <mc:Fallback xmlns="">
-          <p:sp>
-            <p:nvSpPr>
-              <p:cNvPr id="12" name="Google Shape;73;p14"/>
-              <p:cNvSpPr txBox="1">
-                <a:spLocks noRot="1" noChangeAspect="1" noMove="1" noResize="1" noEditPoints="1" noAdjustHandles="1" noChangeArrowheads="1" noChangeShapeType="1" noTextEdit="1"/>
-              </p:cNvSpPr>
-              <p:nvPr/>
-            </p:nvSpPr>
-            <p:spPr>
-              <a:xfrm>
-                <a:off x="3573750" y="1282044"/>
-                <a:ext cx="3456103" cy="1804867"/>
-              </a:xfrm>
-              <a:prstGeom prst="rect">
-                <a:avLst/>
-              </a:prstGeom>
-              <a:blipFill rotWithShape="1">
-                <a:blip r:embed="rId5"/>
-                <a:stretch>
-                  <a:fillRect t="-1014"/>
-                </a:stretch>
-              </a:blipFill>
-              <a:ln>
-                <a:noFill/>
-              </a:ln>
-            </p:spPr>
-            <p:txBody>
-              <a:bodyPr/>
-              <a:lstStyle/>
-              <a:p>
-                <a:r>
-                  <a:rPr lang="ru-RU">
-                    <a:noFill/>
-                  </a:rPr>
-                  <a:t> </a:t>
-                </a:r>
-              </a:p>
-            </p:txBody>
-          </p:sp>
-        </mc:Fallback>
-      </mc:AlternateContent>
-      <p:sp>
-        <p:nvSpPr>
-          <p:cNvPr id="2" name="Номер слайда 1"/>
-          <p:cNvSpPr>
-            <a:spLocks noGrp="1"/>
-          </p:cNvSpPr>
-          <p:nvPr>
-            <p:ph type="sldNum" idx="12"/>
-          </p:nvPr>
-        </p:nvSpPr>
-        <p:spPr/>
-        <p:txBody>
-          <a:bodyPr/>
-          <a:lstStyle/>
-          <a:p>
-            <a:pPr marL="0" lvl="0" indent="0" algn="r" rtl="0">
-              <a:spcBef>
-                <a:spcPts val="0"/>
-              </a:spcBef>
-              <a:spcAft>
-                <a:spcPts val="0"/>
-              </a:spcAft>
-              <a:buNone/>
-            </a:pPr>
-            <a:fld id="{00000000-1234-1234-1234-123412341234}" type="slidenum">
-              <a:rPr lang="ru" smtClean="0"/>
-              <a:t>9</a:t>
-            </a:fld>
-            <a:endParaRPr lang="ru"/>
-          </a:p>
-        </p:txBody>
-      </p:sp>
-    </p:spTree>
-    <p:extLst>
-      <p:ext uri="{BB962C8B-B14F-4D97-AF65-F5344CB8AC3E}">
-        <p14:creationId xmlns:p14="http://schemas.microsoft.com/office/powerpoint/2010/main" val="2823519388"/>
       </p:ext>
     </p:extLst>
   </p:cSld>
